--- a/output/wordlabs-over-prefix-3day.pptx
+++ b/output/wordlabs-over-prefix-3day.pptx
@@ -6040,7 +6040,7 @@
                 <a:ea typeface="Calibri" pitchFamily="34" charset="-122"/>
                 <a:cs typeface="Calibri" pitchFamily="34" charset="-120"/>
               </a:rPr>
-              <a:t>The river started to </a:t>
+              <a:t>The tired campers </a:t>
             </a:r>
             <a:pPr algn="l" indent="0" marL="0">
               <a:buNone/>
@@ -6057,7 +6057,7 @@
                 <a:ea typeface="Calibri" pitchFamily="34" charset="-122"/>
                 <a:cs typeface="Calibri" pitchFamily="34" charset="-120"/>
               </a:rPr>
-              <a:t>overflow</a:t>
+              <a:t>overslept</a:t>
             </a:r>
             <a:pPr algn="l" indent="0" marL="0">
               <a:buNone/>
@@ -6071,7 +6071,7 @@
                 <a:ea typeface="Calibri" pitchFamily="34" charset="-122"/>
                 <a:cs typeface="Calibri" pitchFamily="34" charset="-120"/>
               </a:rPr>
-              <a:t> after the heavy rain, so the road was </a:t>
+              <a:t> and nearly </a:t>
             </a:r>
             <a:pPr algn="l" indent="0" marL="0">
               <a:buNone/>
@@ -6088,7 +6088,7 @@
                 <a:ea typeface="Calibri" pitchFamily="34" charset="-122"/>
                 <a:cs typeface="Calibri" pitchFamily="34" charset="-120"/>
               </a:rPr>
-              <a:t>overloaded</a:t>
+              <a:t>overlooked</a:t>
             </a:r>
             <a:pPr algn="l" indent="0" marL="0">
               <a:buNone/>
@@ -6102,7 +6102,7 @@
                 <a:ea typeface="Calibri" pitchFamily="34" charset="-122"/>
                 <a:cs typeface="Calibri" pitchFamily="34" charset="-120"/>
               </a:rPr>
-              <a:t> with mud.</a:t>
+              <a:t> the morning bird walk.</a:t>
             </a:r>
             <a:endParaRPr lang="en-US" sz="1800" dirty="0"/>
           </a:p>
@@ -6257,7 +6257,7 @@
                 <a:ea typeface="Trebuchet MS" pitchFamily="34" charset="-122"/>
                 <a:cs typeface="Trebuchet MS" pitchFamily="34" charset="-120"/>
               </a:rPr>
-              <a:t>overflow</a:t>
+              <a:t>overslept</a:t>
             </a:r>
             <a:endParaRPr lang="en-US" sz="1400" dirty="0"/>
           </a:p>
@@ -6385,7 +6385,7 @@
                 <a:ea typeface="Trebuchet MS" pitchFamily="34" charset="-122"/>
                 <a:cs typeface="Trebuchet MS" pitchFamily="34" charset="-120"/>
               </a:rPr>
-              <a:t>overloaded</a:t>
+              <a:t>overlooked</a:t>
             </a:r>
             <a:endParaRPr lang="en-US" sz="1400" dirty="0"/>
           </a:p>
@@ -6855,7 +6855,7 @@
                 <a:ea typeface="Trebuchet MS" pitchFamily="34" charset="-122"/>
                 <a:cs typeface="Trebuchet MS" pitchFamily="34" charset="-120"/>
               </a:rPr>
-              <a:t>overflow</a:t>
+              <a:t>overslept</a:t>
             </a:r>
             <a:endParaRPr lang="en-US" sz="2800" dirty="0"/>
           </a:p>
@@ -7682,7 +7682,7 @@
                 <a:ea typeface="Trebuchet MS" pitchFamily="34" charset="-122"/>
                 <a:cs typeface="Trebuchet MS" pitchFamily="34" charset="-120"/>
               </a:rPr>
-              <a:t>overflow</a:t>
+              <a:t>overslept</a:t>
             </a:r>
             <a:endParaRPr lang="en-US" sz="2800" dirty="0"/>
           </a:p>
@@ -7860,7 +7860,7 @@
                 <a:ea typeface="Calibri" pitchFamily="34" charset="-122"/>
                 <a:cs typeface="Calibri" pitchFamily="34" charset="-120"/>
               </a:rPr>
-              <a:t>beyond, too much</a:t>
+              <a:t>beyond / too much</a:t>
             </a:r>
             <a:endParaRPr lang="en-US" sz="850" dirty="0"/>
           </a:p>
@@ -7933,7 +7933,7 @@
                 <a:ea typeface="Trebuchet MS" pitchFamily="34" charset="-122"/>
                 <a:cs typeface="Trebuchet MS" pitchFamily="34" charset="-120"/>
               </a:rPr>
-              <a:t>flow</a:t>
+              <a:t>slept</a:t>
             </a:r>
             <a:endParaRPr lang="en-US" sz="1300" dirty="0"/>
           </a:p>
@@ -7972,7 +7972,7 @@
                 <a:ea typeface="Calibri" pitchFamily="34" charset="-122"/>
                 <a:cs typeface="Calibri" pitchFamily="34" charset="-120"/>
               </a:rPr>
-              <a:t>to move like water</a:t>
+              <a:t>past tense of sleep</a:t>
             </a:r>
             <a:endParaRPr lang="en-US" sz="850" dirty="0"/>
           </a:p>
@@ -8667,7 +8667,7 @@
                 <a:ea typeface="Trebuchet MS" pitchFamily="34" charset="-122"/>
                 <a:cs typeface="Trebuchet MS" pitchFamily="34" charset="-120"/>
               </a:rPr>
-              <a:t>overflow</a:t>
+              <a:t>overslept</a:t>
             </a:r>
             <a:endParaRPr lang="en-US" sz="2800" dirty="0"/>
           </a:p>
@@ -8845,7 +8845,7 @@
                 <a:ea typeface="Calibri" pitchFamily="34" charset="-122"/>
                 <a:cs typeface="Calibri" pitchFamily="34" charset="-120"/>
               </a:rPr>
-              <a:t>beyond, too much</a:t>
+              <a:t>beyond / too much</a:t>
             </a:r>
             <a:endParaRPr lang="en-US" sz="850" dirty="0"/>
           </a:p>
@@ -8918,7 +8918,7 @@
                 <a:ea typeface="Trebuchet MS" pitchFamily="34" charset="-122"/>
                 <a:cs typeface="Trebuchet MS" pitchFamily="34" charset="-120"/>
               </a:rPr>
-              <a:t>flow</a:t>
+              <a:t>slept</a:t>
             </a:r>
             <a:endParaRPr lang="en-US" sz="1300" dirty="0"/>
           </a:p>
@@ -8957,7 +8957,7 @@
                 <a:ea typeface="Calibri" pitchFamily="34" charset="-122"/>
                 <a:cs typeface="Calibri" pitchFamily="34" charset="-120"/>
               </a:rPr>
-              <a:t>to move like water</a:t>
+              <a:t>past tense of sleep</a:t>
             </a:r>
             <a:endParaRPr lang="en-US" sz="850" dirty="0"/>
           </a:p>
@@ -9326,7 +9326,7 @@
                 <a:ea typeface="Trebuchet MS" pitchFamily="34" charset="-122"/>
                 <a:cs typeface="Trebuchet MS" pitchFamily="34" charset="-120"/>
               </a:rPr>
-              <a:t>flow</a:t>
+              <a:t>slept</a:t>
             </a:r>
             <a:endParaRPr lang="en-US" sz="1400" dirty="0"/>
           </a:p>
@@ -9889,7 +9889,7 @@
                 <a:ea typeface="Trebuchet MS" pitchFamily="34" charset="-122"/>
                 <a:cs typeface="Trebuchet MS" pitchFamily="34" charset="-120"/>
               </a:rPr>
-              <a:t>overflow</a:t>
+              <a:t>overslept</a:t>
             </a:r>
             <a:endParaRPr lang="en-US" sz="2800" dirty="0"/>
           </a:p>
@@ -10067,7 +10067,7 @@
                 <a:ea typeface="Calibri" pitchFamily="34" charset="-122"/>
                 <a:cs typeface="Calibri" pitchFamily="34" charset="-120"/>
               </a:rPr>
-              <a:t>beyond, too much</a:t>
+              <a:t>beyond / too much</a:t>
             </a:r>
             <a:endParaRPr lang="en-US" sz="850" dirty="0"/>
           </a:p>
@@ -10140,7 +10140,7 @@
                 <a:ea typeface="Trebuchet MS" pitchFamily="34" charset="-122"/>
                 <a:cs typeface="Trebuchet MS" pitchFamily="34" charset="-120"/>
               </a:rPr>
-              <a:t>flow</a:t>
+              <a:t>slept</a:t>
             </a:r>
             <a:endParaRPr lang="en-US" sz="1300" dirty="0"/>
           </a:p>
@@ -10179,7 +10179,7 @@
                 <a:ea typeface="Calibri" pitchFamily="34" charset="-122"/>
                 <a:cs typeface="Calibri" pitchFamily="34" charset="-120"/>
               </a:rPr>
-              <a:t>to move like water</a:t>
+              <a:t>past tense of sleep</a:t>
             </a:r>
             <a:endParaRPr lang="en-US" sz="850" dirty="0"/>
           </a:p>
@@ -10548,7 +10548,7 @@
                 <a:ea typeface="Trebuchet MS" pitchFamily="34" charset="-122"/>
                 <a:cs typeface="Trebuchet MS" pitchFamily="34" charset="-120"/>
               </a:rPr>
-              <a:t>flow</a:t>
+              <a:t>slept</a:t>
             </a:r>
             <a:endParaRPr lang="en-US" sz="1400" dirty="0"/>
           </a:p>
@@ -10655,7 +10655,7 @@
         </p:nvSpPr>
         <p:spPr>
           <a:xfrm>
-            <a:off x="2254649" y="4169664"/>
+            <a:off x="2023872" y="4169664"/>
             <a:ext cx="685800" cy="475488"/>
           </a:xfrm>
           <a:prstGeom prst="rect">
@@ -10682,7 +10682,7 @@
         </p:nvSpPr>
         <p:spPr>
           <a:xfrm>
-            <a:off x="2254649" y="4169664"/>
+            <a:off x="2023872" y="4169664"/>
             <a:ext cx="685800" cy="475488"/>
           </a:xfrm>
           <a:prstGeom prst="rect">
@@ -10721,7 +10721,7 @@
         </p:nvSpPr>
         <p:spPr>
           <a:xfrm>
-            <a:off x="3293146" y="4169664"/>
+            <a:off x="2831592" y="4169664"/>
             <a:ext cx="685800" cy="475488"/>
           </a:xfrm>
           <a:prstGeom prst="rect">
@@ -10748,7 +10748,7 @@
         </p:nvSpPr>
         <p:spPr>
           <a:xfrm>
-            <a:off x="3293146" y="4169664"/>
+            <a:off x="2831592" y="4169664"/>
             <a:ext cx="685800" cy="475488"/>
           </a:xfrm>
           <a:prstGeom prst="rect">
@@ -10787,7 +10787,7 @@
         </p:nvSpPr>
         <p:spPr>
           <a:xfrm>
-            <a:off x="4331643" y="4169664"/>
+            <a:off x="3639312" y="4169664"/>
             <a:ext cx="685800" cy="475488"/>
           </a:xfrm>
           <a:prstGeom prst="rect">
@@ -10814,7 +10814,7 @@
         </p:nvSpPr>
         <p:spPr>
           <a:xfrm>
-            <a:off x="4331643" y="4169664"/>
+            <a:off x="3639312" y="4169664"/>
             <a:ext cx="685800" cy="475488"/>
           </a:xfrm>
           <a:prstGeom prst="rect">
@@ -10853,7 +10853,7 @@
         </p:nvSpPr>
         <p:spPr>
           <a:xfrm>
-            <a:off x="5370141" y="4169664"/>
+            <a:off x="4447032" y="4169664"/>
             <a:ext cx="685800" cy="475488"/>
           </a:xfrm>
           <a:prstGeom prst="rect">
@@ -10880,7 +10880,7 @@
         </p:nvSpPr>
         <p:spPr>
           <a:xfrm>
-            <a:off x="5370141" y="4169664"/>
+            <a:off x="4447032" y="4169664"/>
             <a:ext cx="685800" cy="475488"/>
           </a:xfrm>
           <a:prstGeom prst="rect">
@@ -10905,7 +10905,7 @@
                 <a:ea typeface="Trebuchet MS" pitchFamily="34" charset="-122"/>
                 <a:cs typeface="Trebuchet MS" pitchFamily="34" charset="-120"/>
               </a:rPr>
-              <a:t>f</a:t>
+              <a:t>s</a:t>
             </a:r>
             <a:endParaRPr lang="en-US" sz="900" dirty="0"/>
           </a:p>
@@ -10919,7 +10919,7 @@
         </p:nvSpPr>
         <p:spPr>
           <a:xfrm>
-            <a:off x="6408638" y="4169664"/>
+            <a:off x="5254752" y="4169664"/>
             <a:ext cx="685800" cy="475488"/>
           </a:xfrm>
           <a:prstGeom prst="rect">
@@ -10946,7 +10946,7 @@
         </p:nvSpPr>
         <p:spPr>
           <a:xfrm>
-            <a:off x="6408638" y="4169664"/>
+            <a:off x="5254752" y="4169664"/>
             <a:ext cx="685800" cy="475488"/>
           </a:xfrm>
           <a:prstGeom prst="rect">
@@ -10985,7 +10985,7 @@
         </p:nvSpPr>
         <p:spPr>
           <a:xfrm>
-            <a:off x="7447135" y="4169664"/>
+            <a:off x="6062472" y="4169664"/>
             <a:ext cx="685800" cy="475488"/>
           </a:xfrm>
           <a:prstGeom prst="rect">
@@ -11012,7 +11012,7 @@
         </p:nvSpPr>
         <p:spPr>
           <a:xfrm>
-            <a:off x="7447135" y="4169664"/>
+            <a:off x="6062472" y="4169664"/>
             <a:ext cx="685800" cy="475488"/>
           </a:xfrm>
           <a:prstGeom prst="rect">
@@ -11037,7 +11037,139 @@
                 <a:ea typeface="Trebuchet MS" pitchFamily="34" charset="-122"/>
                 <a:cs typeface="Trebuchet MS" pitchFamily="34" charset="-120"/>
               </a:rPr>
-              <a:t>ow</a:t>
+              <a:t>e</a:t>
+            </a:r>
+            <a:endParaRPr lang="en-US" sz="900" dirty="0"/>
+          </a:p>
+        </p:txBody>
+      </p:sp>
+      <p:sp>
+        <p:nvSpPr>
+          <p:cNvPr id="48" name="Shape 46"/>
+          <p:cNvSpPr/>
+          <p:nvPr/>
+        </p:nvSpPr>
+        <p:spPr>
+          <a:xfrm>
+            <a:off x="6870192" y="4169664"/>
+            <a:ext cx="685800" cy="475488"/>
+          </a:xfrm>
+          <a:prstGeom prst="rect">
+            <a:avLst>
+              <a:gd name="adj" fmla="val 7692"/>
+            </a:avLst>
+          </a:prstGeom>
+          <a:solidFill>
+            <a:srgbClr val="FFFFFF"/>
+          </a:solidFill>
+          <a:ln w="12700">
+            <a:solidFill>
+              <a:srgbClr val="DB2777"/>
+            </a:solidFill>
+            <a:prstDash val="solid"/>
+          </a:ln>
+        </p:spPr>
+      </p:sp>
+      <p:sp>
+        <p:nvSpPr>
+          <p:cNvPr id="49" name="Text 47"/>
+          <p:cNvSpPr/>
+          <p:nvPr/>
+        </p:nvSpPr>
+        <p:spPr>
+          <a:xfrm>
+            <a:off x="6870192" y="4169664"/>
+            <a:ext cx="685800" cy="475488"/>
+          </a:xfrm>
+          <a:prstGeom prst="rect">
+            <a:avLst/>
+          </a:prstGeom>
+          <a:noFill/>
+          <a:ln/>
+        </p:spPr>
+        <p:txBody>
+          <a:bodyPr wrap="square" lIns="0" tIns="0" rIns="0" bIns="0" rtlCol="0" anchor="ctr"/>
+          <a:lstStyle/>
+          <a:p>
+            <a:pPr algn="ctr" indent="0" marL="0">
+              <a:buNone/>
+            </a:pPr>
+            <a:r>
+              <a:rPr lang="en-US" sz="900" b="1" dirty="0">
+                <a:solidFill>
+                  <a:srgbClr val="9D174D"/>
+                </a:solidFill>
+                <a:latin typeface="Trebuchet MS" pitchFamily="34" charset="0"/>
+                <a:ea typeface="Trebuchet MS" pitchFamily="34" charset="-122"/>
+                <a:cs typeface="Trebuchet MS" pitchFamily="34" charset="-120"/>
+              </a:rPr>
+              <a:t>p</a:t>
+            </a:r>
+            <a:endParaRPr lang="en-US" sz="900" dirty="0"/>
+          </a:p>
+        </p:txBody>
+      </p:sp>
+      <p:sp>
+        <p:nvSpPr>
+          <p:cNvPr id="50" name="Shape 48"/>
+          <p:cNvSpPr/>
+          <p:nvPr/>
+        </p:nvSpPr>
+        <p:spPr>
+          <a:xfrm>
+            <a:off x="7677912" y="4169664"/>
+            <a:ext cx="685800" cy="475488"/>
+          </a:xfrm>
+          <a:prstGeom prst="rect">
+            <a:avLst>
+              <a:gd name="adj" fmla="val 7692"/>
+            </a:avLst>
+          </a:prstGeom>
+          <a:solidFill>
+            <a:srgbClr val="FFFFFF"/>
+          </a:solidFill>
+          <a:ln w="12700">
+            <a:solidFill>
+              <a:srgbClr val="DB2777"/>
+            </a:solidFill>
+            <a:prstDash val="solid"/>
+          </a:ln>
+        </p:spPr>
+      </p:sp>
+      <p:sp>
+        <p:nvSpPr>
+          <p:cNvPr id="51" name="Text 49"/>
+          <p:cNvSpPr/>
+          <p:nvPr/>
+        </p:nvSpPr>
+        <p:spPr>
+          <a:xfrm>
+            <a:off x="7677912" y="4169664"/>
+            <a:ext cx="685800" cy="475488"/>
+          </a:xfrm>
+          <a:prstGeom prst="rect">
+            <a:avLst/>
+          </a:prstGeom>
+          <a:noFill/>
+          <a:ln/>
+        </p:spPr>
+        <p:txBody>
+          <a:bodyPr wrap="square" lIns="0" tIns="0" rIns="0" bIns="0" rtlCol="0" anchor="ctr"/>
+          <a:lstStyle/>
+          <a:p>
+            <a:pPr algn="ctr" indent="0" marL="0">
+              <a:buNone/>
+            </a:pPr>
+            <a:r>
+              <a:rPr lang="en-US" sz="900" b="1" dirty="0">
+                <a:solidFill>
+                  <a:srgbClr val="9D174D"/>
+                </a:solidFill>
+                <a:latin typeface="Trebuchet MS" pitchFamily="34" charset="0"/>
+                <a:ea typeface="Trebuchet MS" pitchFamily="34" charset="-122"/>
+                <a:cs typeface="Trebuchet MS" pitchFamily="34" charset="-120"/>
+              </a:rPr>
+              <a:t>t</a:t>
             </a:r>
             <a:endParaRPr lang="en-US" sz="900" dirty="0"/>
           </a:p>
@@ -11468,7 +11600,7 @@
                 <a:ea typeface="Trebuchet MS" pitchFamily="34" charset="-122"/>
                 <a:cs typeface="Trebuchet MS" pitchFamily="34" charset="-120"/>
               </a:rPr>
-              <a:t>overloaded</a:t>
+              <a:t>overlooked</a:t>
             </a:r>
             <a:endParaRPr lang="en-US" sz="2800" dirty="0"/>
           </a:p>
@@ -12295,7 +12427,7 @@
                 <a:ea typeface="Trebuchet MS" pitchFamily="34" charset="-122"/>
                 <a:cs typeface="Trebuchet MS" pitchFamily="34" charset="-120"/>
               </a:rPr>
-              <a:t>overloaded</a:t>
+              <a:t>overlooked</a:t>
             </a:r>
             <a:endParaRPr lang="en-US" sz="2800" dirty="0"/>
           </a:p>
@@ -12473,7 +12605,7 @@
                 <a:ea typeface="Calibri" pitchFamily="34" charset="-122"/>
                 <a:cs typeface="Calibri" pitchFamily="34" charset="-120"/>
               </a:rPr>
-              <a:t>too much</a:t>
+              <a:t>above / beyond</a:t>
             </a:r>
             <a:endParaRPr lang="en-US" sz="850" dirty="0"/>
           </a:p>
@@ -12496,11 +12628,11 @@
             </a:avLst>
           </a:prstGeom>
           <a:solidFill>
-            <a:srgbClr val="FCE7F3"/>
+            <a:srgbClr val="DDD6FE"/>
           </a:solidFill>
           <a:ln w="19050">
             <a:solidFill>
-              <a:srgbClr val="DB2777"/>
+              <a:srgbClr val="7C3AED"/>
             </a:solidFill>
             <a:prstDash val="solid"/>
           </a:ln>
@@ -12540,13 +12672,13 @@
             <a:r>
               <a:rPr lang="en-US" sz="1300" b="1" dirty="0">
                 <a:solidFill>
-                  <a:srgbClr val="9D174D"/>
+                  <a:srgbClr val="4C1D95"/>
                 </a:solidFill>
                 <a:latin typeface="Trebuchet MS" pitchFamily="34" charset="0"/>
                 <a:ea typeface="Trebuchet MS" pitchFamily="34" charset="-122"/>
                 <a:cs typeface="Trebuchet MS" pitchFamily="34" charset="-120"/>
               </a:rPr>
-              <a:t>load</a:t>
+              <a:t>look</a:t>
             </a:r>
             <a:endParaRPr lang="en-US" sz="1300" dirty="0"/>
           </a:p>
@@ -12585,7 +12717,7 @@
                 <a:ea typeface="Calibri" pitchFamily="34" charset="-122"/>
                 <a:cs typeface="Calibri" pitchFamily="34" charset="-120"/>
               </a:rPr>
-              <a:t>a heavy amount carried</a:t>
+              <a:t>to see or notice</a:t>
             </a:r>
             <a:endParaRPr lang="en-US" sz="850" dirty="0"/>
           </a:p>
@@ -13392,7 +13524,7 @@
                 <a:ea typeface="Trebuchet MS" pitchFamily="34" charset="-122"/>
                 <a:cs typeface="Trebuchet MS" pitchFamily="34" charset="-120"/>
               </a:rPr>
-              <a:t>overloaded</a:t>
+              <a:t>overlooked</a:t>
             </a:r>
             <a:endParaRPr lang="en-US" sz="2800" dirty="0"/>
           </a:p>
@@ -13570,7 +13702,7 @@
                 <a:ea typeface="Calibri" pitchFamily="34" charset="-122"/>
                 <a:cs typeface="Calibri" pitchFamily="34" charset="-120"/>
               </a:rPr>
-              <a:t>too much</a:t>
+              <a:t>above / beyond</a:t>
             </a:r>
             <a:endParaRPr lang="en-US" sz="850" dirty="0"/>
           </a:p>
@@ -13593,11 +13725,11 @@
             </a:avLst>
           </a:prstGeom>
           <a:solidFill>
-            <a:srgbClr val="FCE7F3"/>
+            <a:srgbClr val="DDD6FE"/>
           </a:solidFill>
           <a:ln w="19050">
             <a:solidFill>
-              <a:srgbClr val="DB2777"/>
+              <a:srgbClr val="7C3AED"/>
             </a:solidFill>
             <a:prstDash val="solid"/>
           </a:ln>
@@ -13637,13 +13769,13 @@
             <a:r>
               <a:rPr lang="en-US" sz="1300" b="1" dirty="0">
                 <a:solidFill>
-                  <a:srgbClr val="9D174D"/>
+                  <a:srgbClr val="4C1D95"/>
                 </a:solidFill>
                 <a:latin typeface="Trebuchet MS" pitchFamily="34" charset="0"/>
                 <a:ea typeface="Trebuchet MS" pitchFamily="34" charset="-122"/>
                 <a:cs typeface="Trebuchet MS" pitchFamily="34" charset="-120"/>
               </a:rPr>
-              <a:t>load</a:t>
+              <a:t>look</a:t>
             </a:r>
             <a:endParaRPr lang="en-US" sz="1300" dirty="0"/>
           </a:p>
@@ -13682,7 +13814,7 @@
                 <a:ea typeface="Calibri" pitchFamily="34" charset="-122"/>
                 <a:cs typeface="Calibri" pitchFamily="34" charset="-120"/>
               </a:rPr>
-              <a:t>a heavy amount carried</a:t>
+              <a:t>to see or notice</a:t>
             </a:r>
             <a:endParaRPr lang="en-US" sz="850" dirty="0"/>
           </a:p>
@@ -13901,8 +14033,8 @@
         </p:nvSpPr>
         <p:spPr>
           <a:xfrm>
-            <a:off x="1975104" y="3364992"/>
-            <a:ext cx="1554480" cy="475488"/>
+            <a:off x="2313432" y="3364992"/>
+            <a:ext cx="1645920" cy="475488"/>
           </a:xfrm>
           <a:prstGeom prst="rect">
             <a:avLst>
@@ -13928,8 +14060,8 @@
         </p:nvSpPr>
         <p:spPr>
           <a:xfrm>
-            <a:off x="1975104" y="3364992"/>
-            <a:ext cx="1554480" cy="475488"/>
+            <a:off x="2313432" y="3364992"/>
+            <a:ext cx="1645920" cy="475488"/>
           </a:xfrm>
           <a:prstGeom prst="rect">
             <a:avLst/>
@@ -13967,8 +14099,8 @@
         </p:nvSpPr>
         <p:spPr>
           <a:xfrm>
-            <a:off x="3529584" y="3364992"/>
-            <a:ext cx="73152" cy="475488"/>
+            <a:off x="3959352" y="3364992"/>
+            <a:ext cx="411480" cy="475488"/>
           </a:xfrm>
           <a:prstGeom prst="rect">
             <a:avLst/>
@@ -14006,8 +14138,8 @@
         </p:nvSpPr>
         <p:spPr>
           <a:xfrm>
-            <a:off x="3602736" y="3364992"/>
-            <a:ext cx="1554480" cy="475488"/>
+            <a:off x="4370832" y="3364992"/>
+            <a:ext cx="1645920" cy="475488"/>
           </a:xfrm>
           <a:prstGeom prst="rect">
             <a:avLst>
@@ -14033,8 +14165,8 @@
         </p:nvSpPr>
         <p:spPr>
           <a:xfrm>
-            <a:off x="3602736" y="3364992"/>
-            <a:ext cx="1554480" cy="475488"/>
+            <a:off x="4370832" y="3364992"/>
+            <a:ext cx="1645920" cy="475488"/>
           </a:xfrm>
           <a:prstGeom prst="rect">
             <a:avLst/>
@@ -14072,8 +14204,8 @@
         </p:nvSpPr>
         <p:spPr>
           <a:xfrm>
-            <a:off x="5157216" y="3364992"/>
-            <a:ext cx="73152" cy="475488"/>
+            <a:off x="6016752" y="3364992"/>
+            <a:ext cx="411480" cy="475488"/>
           </a:xfrm>
           <a:prstGeom prst="rect">
             <a:avLst/>
@@ -14111,8 +14243,8 @@
         </p:nvSpPr>
         <p:spPr>
           <a:xfrm>
-            <a:off x="5230368" y="3364992"/>
-            <a:ext cx="1554480" cy="475488"/>
+            <a:off x="6428232" y="3364992"/>
+            <a:ext cx="1645920" cy="475488"/>
           </a:xfrm>
           <a:prstGeom prst="rect">
             <a:avLst>
@@ -14138,8 +14270,8 @@
         </p:nvSpPr>
         <p:spPr>
           <a:xfrm>
-            <a:off x="5230368" y="3364992"/>
-            <a:ext cx="1554480" cy="475488"/>
+            <a:off x="6428232" y="3364992"/>
+            <a:ext cx="1645920" cy="475488"/>
           </a:xfrm>
           <a:prstGeom prst="rect">
             <a:avLst/>
@@ -14163,7 +14295,7 @@
                 <a:ea typeface="Trebuchet MS" pitchFamily="34" charset="-122"/>
                 <a:cs typeface="Trebuchet MS" pitchFamily="34" charset="-120"/>
               </a:rPr>
-              <a:t>load</a:t>
+              <a:t>looked</a:t>
             </a:r>
             <a:endParaRPr lang="en-US" sz="1400" dirty="0"/>
           </a:p>
@@ -14171,119 +14303,80 @@
       </p:sp>
       <p:sp>
         <p:nvSpPr>
-          <p:cNvPr id="36" name="Text 34"/>
-          <p:cNvSpPr/>
-          <p:nvPr/>
-        </p:nvSpPr>
-        <p:spPr>
-          <a:xfrm>
-            <a:off x="6784848" y="3364992"/>
-            <a:ext cx="73152" cy="475488"/>
-          </a:xfrm>
-          <a:prstGeom prst="rect">
-            <a:avLst/>
-          </a:prstGeom>
-          <a:noFill/>
-          <a:ln/>
-        </p:spPr>
-        <p:txBody>
-          <a:bodyPr wrap="square" lIns="0" tIns="0" rIns="0" bIns="0" rtlCol="0" anchor="ctr"/>
-          <a:lstStyle/>
-          <a:p>
-            <a:pPr algn="ctr" indent="0" marL="0">
-              <a:buNone/>
-            </a:pPr>
-            <a:r>
-              <a:rPr lang="en-US" sz="1600" b="1" dirty="0">
-                <a:solidFill>
-                  <a:srgbClr val="0D9488"/>
+          <p:cNvPr id="36" name="Shape 34"/>
+          <p:cNvSpPr/>
+          <p:nvPr/>
+        </p:nvSpPr>
+        <p:spPr>
+          <a:xfrm>
+            <a:off x="365760" y="4096512"/>
+            <a:ext cx="1371600" cy="804672"/>
+          </a:xfrm>
+          <a:prstGeom prst="rect">
+            <a:avLst>
+              <a:gd name="adj" fmla="val 6818"/>
+            </a:avLst>
+          </a:prstGeom>
+          <a:solidFill>
+            <a:srgbClr val="E2E8F0"/>
+          </a:solidFill>
+          <a:ln w="12700">
+            <a:solidFill>
+              <a:srgbClr val="E2E8F0"/>
+            </a:solidFill>
+            <a:prstDash val="solid"/>
+          </a:ln>
+        </p:spPr>
+      </p:sp>
+      <p:sp>
+        <p:nvSpPr>
+          <p:cNvPr id="37" name="Text 35"/>
+          <p:cNvSpPr/>
+          <p:nvPr/>
+        </p:nvSpPr>
+        <p:spPr>
+          <a:xfrm>
+            <a:off x="365760" y="4096512"/>
+            <a:ext cx="1371600" cy="804672"/>
+          </a:xfrm>
+          <a:prstGeom prst="rect">
+            <a:avLst/>
+          </a:prstGeom>
+          <a:noFill/>
+          <a:ln/>
+        </p:spPr>
+        <p:txBody>
+          <a:bodyPr wrap="square" lIns="0" tIns="0" rIns="0" bIns="0" rtlCol="0" anchor="ctr"/>
+          <a:lstStyle/>
+          <a:p>
+            <a:pPr algn="ctr" indent="0" marL="0">
+              <a:buNone/>
+            </a:pPr>
+            <a:r>
+              <a:rPr lang="en-US" sz="1100" b="1" dirty="0">
+                <a:solidFill>
+                  <a:srgbClr val="475569"/>
                 </a:solidFill>
                 <a:latin typeface="Trebuchet MS" pitchFamily="34" charset="0"/>
                 <a:ea typeface="Trebuchet MS" pitchFamily="34" charset="-122"/>
                 <a:cs typeface="Trebuchet MS" pitchFamily="34" charset="-120"/>
               </a:rPr>
-              <a:t>·</a:t>
-            </a:r>
-            <a:endParaRPr lang="en-US" sz="1600" dirty="0"/>
-          </a:p>
-        </p:txBody>
-      </p:sp>
-      <p:sp>
-        <p:nvSpPr>
-          <p:cNvPr id="37" name="Shape 35"/>
-          <p:cNvSpPr/>
-          <p:nvPr/>
-        </p:nvSpPr>
-        <p:spPr>
-          <a:xfrm>
-            <a:off x="6858000" y="3364992"/>
-            <a:ext cx="1554480" cy="475488"/>
-          </a:xfrm>
-          <a:prstGeom prst="rect">
-            <a:avLst>
-              <a:gd name="adj" fmla="val 9615"/>
-            </a:avLst>
-          </a:prstGeom>
-          <a:solidFill>
-            <a:srgbClr val="FFFFFF"/>
-          </a:solidFill>
-          <a:ln w="12700">
-            <a:solidFill>
-              <a:srgbClr val="0D9488"/>
-            </a:solidFill>
-            <a:prstDash val="solid"/>
-          </a:ln>
-        </p:spPr>
-      </p:sp>
-      <p:sp>
-        <p:nvSpPr>
-          <p:cNvPr id="38" name="Text 36"/>
-          <p:cNvSpPr/>
-          <p:nvPr/>
-        </p:nvSpPr>
-        <p:spPr>
-          <a:xfrm>
-            <a:off x="6858000" y="3364992"/>
-            <a:ext cx="1554480" cy="475488"/>
-          </a:xfrm>
-          <a:prstGeom prst="rect">
-            <a:avLst/>
-          </a:prstGeom>
-          <a:noFill/>
-          <a:ln/>
-        </p:spPr>
-        <p:txBody>
-          <a:bodyPr wrap="square" lIns="0" tIns="0" rIns="0" bIns="0" rtlCol="0" anchor="ctr"/>
-          <a:lstStyle/>
-          <a:p>
-            <a:pPr algn="ctr" indent="0" marL="0">
-              <a:buNone/>
-            </a:pPr>
-            <a:r>
-              <a:rPr lang="en-US" sz="1400" b="1" dirty="0">
-                <a:solidFill>
-                  <a:srgbClr val="0D9488"/>
-                </a:solidFill>
-                <a:latin typeface="Trebuchet MS" pitchFamily="34" charset="0"/>
-                <a:ea typeface="Trebuchet MS" pitchFamily="34" charset="-122"/>
-                <a:cs typeface="Trebuchet MS" pitchFamily="34" charset="-120"/>
-              </a:rPr>
-              <a:t>ed</a:t>
-            </a:r>
-            <a:endParaRPr lang="en-US" sz="1400" dirty="0"/>
-          </a:p>
-        </p:txBody>
-      </p:sp>
-      <p:sp>
-        <p:nvSpPr>
-          <p:cNvPr id="39" name="Shape 37"/>
-          <p:cNvSpPr/>
-          <p:nvPr/>
-        </p:nvSpPr>
-        <p:spPr>
-          <a:xfrm>
-            <a:off x="365760" y="4096512"/>
-            <a:ext cx="1371600" cy="804672"/>
+              <a:t>Phonemes</a:t>
+            </a:r>
+            <a:endParaRPr lang="en-US" sz="1100" dirty="0"/>
+          </a:p>
+        </p:txBody>
+      </p:sp>
+      <p:sp>
+        <p:nvSpPr>
+          <p:cNvPr id="38" name="Shape 36"/>
+          <p:cNvSpPr/>
+          <p:nvPr/>
+        </p:nvSpPr>
+        <p:spPr>
+          <a:xfrm>
+            <a:off x="1874520" y="4096512"/>
+            <a:ext cx="6903720" cy="804672"/>
           </a:xfrm>
           <a:prstGeom prst="rect">
             <a:avLst>
@@ -14291,85 +14384,19 @@
             </a:avLst>
           </a:prstGeom>
           <a:solidFill>
-            <a:srgbClr val="E2E8F0"/>
+            <a:srgbClr val="F8FAFC"/>
           </a:solidFill>
           <a:ln w="12700">
             <a:solidFill>
               <a:srgbClr val="E2E8F0"/>
             </a:solidFill>
-            <a:prstDash val="solid"/>
-          </a:ln>
-        </p:spPr>
-      </p:sp>
-      <p:sp>
-        <p:nvSpPr>
-          <p:cNvPr id="40" name="Text 38"/>
-          <p:cNvSpPr/>
-          <p:nvPr/>
-        </p:nvSpPr>
-        <p:spPr>
-          <a:xfrm>
-            <a:off x="365760" y="4096512"/>
-            <a:ext cx="1371600" cy="804672"/>
-          </a:xfrm>
-          <a:prstGeom prst="rect">
-            <a:avLst/>
-          </a:prstGeom>
-          <a:noFill/>
-          <a:ln/>
-        </p:spPr>
-        <p:txBody>
-          <a:bodyPr wrap="square" lIns="0" tIns="0" rIns="0" bIns="0" rtlCol="0" anchor="ctr"/>
-          <a:lstStyle/>
-          <a:p>
-            <a:pPr algn="ctr" indent="0" marL="0">
-              <a:buNone/>
-            </a:pPr>
-            <a:r>
-              <a:rPr lang="en-US" sz="1100" b="1" dirty="0">
-                <a:solidFill>
-                  <a:srgbClr val="475569"/>
-                </a:solidFill>
-                <a:latin typeface="Trebuchet MS" pitchFamily="34" charset="0"/>
-                <a:ea typeface="Trebuchet MS" pitchFamily="34" charset="-122"/>
-                <a:cs typeface="Trebuchet MS" pitchFamily="34" charset="-120"/>
-              </a:rPr>
-              <a:t>Phonemes</a:t>
-            </a:r>
-            <a:endParaRPr lang="en-US" sz="1100" dirty="0"/>
-          </a:p>
-        </p:txBody>
-      </p:sp>
-      <p:sp>
-        <p:nvSpPr>
-          <p:cNvPr id="41" name="Shape 39"/>
-          <p:cNvSpPr/>
-          <p:nvPr/>
-        </p:nvSpPr>
-        <p:spPr>
-          <a:xfrm>
-            <a:off x="1874520" y="4096512"/>
-            <a:ext cx="6903720" cy="804672"/>
-          </a:xfrm>
-          <a:prstGeom prst="rect">
-            <a:avLst>
-              <a:gd name="adj" fmla="val 6818"/>
-            </a:avLst>
-          </a:prstGeom>
-          <a:solidFill>
-            <a:srgbClr val="F8FAFC"/>
-          </a:solidFill>
-          <a:ln w="12700">
-            <a:solidFill>
-              <a:srgbClr val="E2E8F0"/>
-            </a:solidFill>
             <a:prstDash val="dash"/>
           </a:ln>
         </p:spPr>
       </p:sp>
       <p:sp>
         <p:nvSpPr>
-          <p:cNvPr id="42" name="Text 40"/>
+          <p:cNvPr id="39" name="Text 37"/>
           <p:cNvSpPr/>
           <p:nvPr/>
         </p:nvSpPr>
@@ -15096,7 +15123,7 @@
                 <a:ea typeface="Trebuchet MS" pitchFamily="34" charset="-122"/>
                 <a:cs typeface="Trebuchet MS" pitchFamily="34" charset="-120"/>
               </a:rPr>
-              <a:t>overloaded</a:t>
+              <a:t>overlooked</a:t>
             </a:r>
             <a:endParaRPr lang="en-US" sz="2800" dirty="0"/>
           </a:p>
@@ -15274,7 +15301,7 @@
                 <a:ea typeface="Calibri" pitchFamily="34" charset="-122"/>
                 <a:cs typeface="Calibri" pitchFamily="34" charset="-120"/>
               </a:rPr>
-              <a:t>too much</a:t>
+              <a:t>above / beyond</a:t>
             </a:r>
             <a:endParaRPr lang="en-US" sz="850" dirty="0"/>
           </a:p>
@@ -15297,11 +15324,11 @@
             </a:avLst>
           </a:prstGeom>
           <a:solidFill>
-            <a:srgbClr val="FCE7F3"/>
+            <a:srgbClr val="DDD6FE"/>
           </a:solidFill>
           <a:ln w="19050">
             <a:solidFill>
-              <a:srgbClr val="DB2777"/>
+              <a:srgbClr val="7C3AED"/>
             </a:solidFill>
             <a:prstDash val="solid"/>
           </a:ln>
@@ -15341,13 +15368,13 @@
             <a:r>
               <a:rPr lang="en-US" sz="1300" b="1" dirty="0">
                 <a:solidFill>
-                  <a:srgbClr val="9D174D"/>
+                  <a:srgbClr val="4C1D95"/>
                 </a:solidFill>
                 <a:latin typeface="Trebuchet MS" pitchFamily="34" charset="0"/>
                 <a:ea typeface="Trebuchet MS" pitchFamily="34" charset="-122"/>
                 <a:cs typeface="Trebuchet MS" pitchFamily="34" charset="-120"/>
               </a:rPr>
-              <a:t>load</a:t>
+              <a:t>look</a:t>
             </a:r>
             <a:endParaRPr lang="en-US" sz="1300" dirty="0"/>
           </a:p>
@@ -15386,7 +15413,7 @@
                 <a:ea typeface="Calibri" pitchFamily="34" charset="-122"/>
                 <a:cs typeface="Calibri" pitchFamily="34" charset="-120"/>
               </a:rPr>
-              <a:t>a heavy amount carried</a:t>
+              <a:t>to see or notice</a:t>
             </a:r>
             <a:endParaRPr lang="en-US" sz="850" dirty="0"/>
           </a:p>
@@ -15605,8 +15632,8 @@
         </p:nvSpPr>
         <p:spPr>
           <a:xfrm>
-            <a:off x="1975104" y="3364992"/>
-            <a:ext cx="1554480" cy="475488"/>
+            <a:off x="2313432" y="3364992"/>
+            <a:ext cx="1645920" cy="475488"/>
           </a:xfrm>
           <a:prstGeom prst="rect">
             <a:avLst>
@@ -15632,8 +15659,8 @@
         </p:nvSpPr>
         <p:spPr>
           <a:xfrm>
-            <a:off x="1975104" y="3364992"/>
-            <a:ext cx="1554480" cy="475488"/>
+            <a:off x="2313432" y="3364992"/>
+            <a:ext cx="1645920" cy="475488"/>
           </a:xfrm>
           <a:prstGeom prst="rect">
             <a:avLst/>
@@ -15671,8 +15698,8 @@
         </p:nvSpPr>
         <p:spPr>
           <a:xfrm>
-            <a:off x="3529584" y="3364992"/>
-            <a:ext cx="73152" cy="475488"/>
+            <a:off x="3959352" y="3364992"/>
+            <a:ext cx="411480" cy="475488"/>
           </a:xfrm>
           <a:prstGeom prst="rect">
             <a:avLst/>
@@ -15710,8 +15737,8 @@
         </p:nvSpPr>
         <p:spPr>
           <a:xfrm>
-            <a:off x="3602736" y="3364992"/>
-            <a:ext cx="1554480" cy="475488"/>
+            <a:off x="4370832" y="3364992"/>
+            <a:ext cx="1645920" cy="475488"/>
           </a:xfrm>
           <a:prstGeom prst="rect">
             <a:avLst>
@@ -15737,8 +15764,8 @@
         </p:nvSpPr>
         <p:spPr>
           <a:xfrm>
-            <a:off x="3602736" y="3364992"/>
-            <a:ext cx="1554480" cy="475488"/>
+            <a:off x="4370832" y="3364992"/>
+            <a:ext cx="1645920" cy="475488"/>
           </a:xfrm>
           <a:prstGeom prst="rect">
             <a:avLst/>
@@ -15776,8 +15803,8 @@
         </p:nvSpPr>
         <p:spPr>
           <a:xfrm>
-            <a:off x="5157216" y="3364992"/>
-            <a:ext cx="73152" cy="475488"/>
+            <a:off x="6016752" y="3364992"/>
+            <a:ext cx="411480" cy="475488"/>
           </a:xfrm>
           <a:prstGeom prst="rect">
             <a:avLst/>
@@ -15815,8 +15842,8 @@
         </p:nvSpPr>
         <p:spPr>
           <a:xfrm>
-            <a:off x="5230368" y="3364992"/>
-            <a:ext cx="1554480" cy="475488"/>
+            <a:off x="6428232" y="3364992"/>
+            <a:ext cx="1645920" cy="475488"/>
           </a:xfrm>
           <a:prstGeom prst="rect">
             <a:avLst>
@@ -15842,8 +15869,8 @@
         </p:nvSpPr>
         <p:spPr>
           <a:xfrm>
-            <a:off x="5230368" y="3364992"/>
-            <a:ext cx="1554480" cy="475488"/>
+            <a:off x="6428232" y="3364992"/>
+            <a:ext cx="1645920" cy="475488"/>
           </a:xfrm>
           <a:prstGeom prst="rect">
             <a:avLst/>
@@ -15867,7 +15894,7 @@
                 <a:ea typeface="Trebuchet MS" pitchFamily="34" charset="-122"/>
                 <a:cs typeface="Trebuchet MS" pitchFamily="34" charset="-120"/>
               </a:rPr>
-              <a:t>load</a:t>
+              <a:t>looked</a:t>
             </a:r>
             <a:endParaRPr lang="en-US" sz="1400" dirty="0"/>
           </a:p>
@@ -15875,211 +15902,238 @@
       </p:sp>
       <p:sp>
         <p:nvSpPr>
-          <p:cNvPr id="36" name="Text 34"/>
-          <p:cNvSpPr/>
-          <p:nvPr/>
-        </p:nvSpPr>
-        <p:spPr>
-          <a:xfrm>
-            <a:off x="6784848" y="3364992"/>
-            <a:ext cx="73152" cy="475488"/>
-          </a:xfrm>
-          <a:prstGeom prst="rect">
-            <a:avLst/>
-          </a:prstGeom>
-          <a:noFill/>
-          <a:ln/>
-        </p:spPr>
-        <p:txBody>
-          <a:bodyPr wrap="square" lIns="0" tIns="0" rIns="0" bIns="0" rtlCol="0" anchor="ctr"/>
-          <a:lstStyle/>
-          <a:p>
-            <a:pPr algn="ctr" indent="0" marL="0">
-              <a:buNone/>
-            </a:pPr>
-            <a:r>
-              <a:rPr lang="en-US" sz="1600" b="1" dirty="0">
-                <a:solidFill>
-                  <a:srgbClr val="0D9488"/>
+          <p:cNvPr id="36" name="Shape 34"/>
+          <p:cNvSpPr/>
+          <p:nvPr/>
+        </p:nvSpPr>
+        <p:spPr>
+          <a:xfrm>
+            <a:off x="365760" y="4096512"/>
+            <a:ext cx="1371600" cy="804672"/>
+          </a:xfrm>
+          <a:prstGeom prst="rect">
+            <a:avLst>
+              <a:gd name="adj" fmla="val 6818"/>
+            </a:avLst>
+          </a:prstGeom>
+          <a:solidFill>
+            <a:srgbClr val="E2E8F0"/>
+          </a:solidFill>
+          <a:ln w="12700">
+            <a:solidFill>
+              <a:srgbClr val="E2E8F0"/>
+            </a:solidFill>
+            <a:prstDash val="solid"/>
+          </a:ln>
+        </p:spPr>
+      </p:sp>
+      <p:sp>
+        <p:nvSpPr>
+          <p:cNvPr id="37" name="Text 35"/>
+          <p:cNvSpPr/>
+          <p:nvPr/>
+        </p:nvSpPr>
+        <p:spPr>
+          <a:xfrm>
+            <a:off x="365760" y="4096512"/>
+            <a:ext cx="1371600" cy="804672"/>
+          </a:xfrm>
+          <a:prstGeom prst="rect">
+            <a:avLst/>
+          </a:prstGeom>
+          <a:noFill/>
+          <a:ln/>
+        </p:spPr>
+        <p:txBody>
+          <a:bodyPr wrap="square" lIns="0" tIns="0" rIns="0" bIns="0" rtlCol="0" anchor="ctr"/>
+          <a:lstStyle/>
+          <a:p>
+            <a:pPr algn="ctr" indent="0" marL="0">
+              <a:buNone/>
+            </a:pPr>
+            <a:r>
+              <a:rPr lang="en-US" sz="1100" b="1" dirty="0">
+                <a:solidFill>
+                  <a:srgbClr val="475569"/>
                 </a:solidFill>
                 <a:latin typeface="Trebuchet MS" pitchFamily="34" charset="0"/>
                 <a:ea typeface="Trebuchet MS" pitchFamily="34" charset="-122"/>
                 <a:cs typeface="Trebuchet MS" pitchFamily="34" charset="-120"/>
               </a:rPr>
-              <a:t>·</a:t>
-            </a:r>
-            <a:endParaRPr lang="en-US" sz="1600" dirty="0"/>
-          </a:p>
-        </p:txBody>
-      </p:sp>
-      <p:sp>
-        <p:nvSpPr>
-          <p:cNvPr id="37" name="Shape 35"/>
-          <p:cNvSpPr/>
-          <p:nvPr/>
-        </p:nvSpPr>
-        <p:spPr>
-          <a:xfrm>
-            <a:off x="6858000" y="3364992"/>
-            <a:ext cx="1554480" cy="475488"/>
+              <a:t>Phonemes</a:t>
+            </a:r>
+            <a:endParaRPr lang="en-US" sz="1100" dirty="0"/>
+          </a:p>
+        </p:txBody>
+      </p:sp>
+      <p:sp>
+        <p:nvSpPr>
+          <p:cNvPr id="38" name="Shape 36"/>
+          <p:cNvSpPr/>
+          <p:nvPr/>
+        </p:nvSpPr>
+        <p:spPr>
+          <a:xfrm>
+            <a:off x="1874520" y="4096512"/>
+            <a:ext cx="6903720" cy="658368"/>
           </a:xfrm>
           <a:prstGeom prst="rect">
             <a:avLst>
-              <a:gd name="adj" fmla="val 9615"/>
+              <a:gd name="adj" fmla="val 8333"/>
             </a:avLst>
           </a:prstGeom>
           <a:solidFill>
+            <a:srgbClr val="FCE7F3"/>
+          </a:solidFill>
+          <a:ln w="12700">
+            <a:solidFill>
+              <a:srgbClr val="DB2777"/>
+            </a:solidFill>
+            <a:prstDash val="solid"/>
+          </a:ln>
+        </p:spPr>
+      </p:sp>
+      <p:sp>
+        <p:nvSpPr>
+          <p:cNvPr id="39" name="Shape 37"/>
+          <p:cNvSpPr/>
+          <p:nvPr/>
+        </p:nvSpPr>
+        <p:spPr>
+          <a:xfrm>
+            <a:off x="2124837" y="4169664"/>
+            <a:ext cx="685800" cy="475488"/>
+          </a:xfrm>
+          <a:prstGeom prst="rect">
+            <a:avLst>
+              <a:gd name="adj" fmla="val 7692"/>
+            </a:avLst>
+          </a:prstGeom>
+          <a:solidFill>
             <a:srgbClr val="FFFFFF"/>
           </a:solidFill>
           <a:ln w="12700">
             <a:solidFill>
-              <a:srgbClr val="0D9488"/>
-            </a:solidFill>
-            <a:prstDash val="solid"/>
-          </a:ln>
-        </p:spPr>
-      </p:sp>
-      <p:sp>
-        <p:nvSpPr>
-          <p:cNvPr id="38" name="Text 36"/>
-          <p:cNvSpPr/>
-          <p:nvPr/>
-        </p:nvSpPr>
-        <p:spPr>
-          <a:xfrm>
-            <a:off x="6858000" y="3364992"/>
-            <a:ext cx="1554480" cy="475488"/>
-          </a:xfrm>
-          <a:prstGeom prst="rect">
-            <a:avLst/>
-          </a:prstGeom>
-          <a:noFill/>
-          <a:ln/>
-        </p:spPr>
-        <p:txBody>
-          <a:bodyPr wrap="square" lIns="0" tIns="0" rIns="0" bIns="0" rtlCol="0" anchor="ctr"/>
-          <a:lstStyle/>
-          <a:p>
-            <a:pPr algn="ctr" indent="0" marL="0">
-              <a:buNone/>
-            </a:pPr>
-            <a:r>
-              <a:rPr lang="en-US" sz="1400" b="1" dirty="0">
-                <a:solidFill>
-                  <a:srgbClr val="0D9488"/>
+              <a:srgbClr val="DB2777"/>
+            </a:solidFill>
+            <a:prstDash val="solid"/>
+          </a:ln>
+        </p:spPr>
+      </p:sp>
+      <p:sp>
+        <p:nvSpPr>
+          <p:cNvPr id="40" name="Text 38"/>
+          <p:cNvSpPr/>
+          <p:nvPr/>
+        </p:nvSpPr>
+        <p:spPr>
+          <a:xfrm>
+            <a:off x="2124837" y="4169664"/>
+            <a:ext cx="685800" cy="475488"/>
+          </a:xfrm>
+          <a:prstGeom prst="rect">
+            <a:avLst/>
+          </a:prstGeom>
+          <a:noFill/>
+          <a:ln/>
+        </p:spPr>
+        <p:txBody>
+          <a:bodyPr wrap="square" lIns="0" tIns="0" rIns="0" bIns="0" rtlCol="0" anchor="ctr"/>
+          <a:lstStyle/>
+          <a:p>
+            <a:pPr algn="ctr" indent="0" marL="0">
+              <a:buNone/>
+            </a:pPr>
+            <a:r>
+              <a:rPr lang="en-US" sz="900" b="1" dirty="0">
+                <a:solidFill>
+                  <a:srgbClr val="9D174D"/>
                 </a:solidFill>
                 <a:latin typeface="Trebuchet MS" pitchFamily="34" charset="0"/>
                 <a:ea typeface="Trebuchet MS" pitchFamily="34" charset="-122"/>
                 <a:cs typeface="Trebuchet MS" pitchFamily="34" charset="-120"/>
               </a:rPr>
-              <a:t>ed</a:t>
-            </a:r>
-            <a:endParaRPr lang="en-US" sz="1400" dirty="0"/>
-          </a:p>
-        </p:txBody>
-      </p:sp>
-      <p:sp>
-        <p:nvSpPr>
-          <p:cNvPr id="39" name="Shape 37"/>
-          <p:cNvSpPr/>
-          <p:nvPr/>
-        </p:nvSpPr>
-        <p:spPr>
-          <a:xfrm>
-            <a:off x="365760" y="4096512"/>
-            <a:ext cx="1371600" cy="804672"/>
+              <a:t>o</a:t>
+            </a:r>
+            <a:endParaRPr lang="en-US" sz="900" dirty="0"/>
+          </a:p>
+        </p:txBody>
+      </p:sp>
+      <p:sp>
+        <p:nvSpPr>
+          <p:cNvPr id="41" name="Shape 39"/>
+          <p:cNvSpPr/>
+          <p:nvPr/>
+        </p:nvSpPr>
+        <p:spPr>
+          <a:xfrm>
+            <a:off x="3033522" y="4169664"/>
+            <a:ext cx="685800" cy="475488"/>
           </a:xfrm>
           <a:prstGeom prst="rect">
             <a:avLst>
-              <a:gd name="adj" fmla="val 6818"/>
+              <a:gd name="adj" fmla="val 7692"/>
             </a:avLst>
           </a:prstGeom>
           <a:solidFill>
-            <a:srgbClr val="E2E8F0"/>
-          </a:solidFill>
-          <a:ln w="12700">
-            <a:solidFill>
-              <a:srgbClr val="E2E8F0"/>
-            </a:solidFill>
-            <a:prstDash val="solid"/>
-          </a:ln>
-        </p:spPr>
-      </p:sp>
-      <p:sp>
-        <p:nvSpPr>
-          <p:cNvPr id="40" name="Text 38"/>
-          <p:cNvSpPr/>
-          <p:nvPr/>
-        </p:nvSpPr>
-        <p:spPr>
-          <a:xfrm>
-            <a:off x="365760" y="4096512"/>
-            <a:ext cx="1371600" cy="804672"/>
-          </a:xfrm>
-          <a:prstGeom prst="rect">
-            <a:avLst/>
-          </a:prstGeom>
-          <a:noFill/>
-          <a:ln/>
-        </p:spPr>
-        <p:txBody>
-          <a:bodyPr wrap="square" lIns="0" tIns="0" rIns="0" bIns="0" rtlCol="0" anchor="ctr"/>
-          <a:lstStyle/>
-          <a:p>
-            <a:pPr algn="ctr" indent="0" marL="0">
-              <a:buNone/>
-            </a:pPr>
-            <a:r>
-              <a:rPr lang="en-US" sz="1100" b="1" dirty="0">
-                <a:solidFill>
-                  <a:srgbClr val="475569"/>
+            <a:srgbClr val="FFFFFF"/>
+          </a:solidFill>
+          <a:ln w="12700">
+            <a:solidFill>
+              <a:srgbClr val="DB2777"/>
+            </a:solidFill>
+            <a:prstDash val="solid"/>
+          </a:ln>
+        </p:spPr>
+      </p:sp>
+      <p:sp>
+        <p:nvSpPr>
+          <p:cNvPr id="42" name="Text 40"/>
+          <p:cNvSpPr/>
+          <p:nvPr/>
+        </p:nvSpPr>
+        <p:spPr>
+          <a:xfrm>
+            <a:off x="3033522" y="4169664"/>
+            <a:ext cx="685800" cy="475488"/>
+          </a:xfrm>
+          <a:prstGeom prst="rect">
+            <a:avLst/>
+          </a:prstGeom>
+          <a:noFill/>
+          <a:ln/>
+        </p:spPr>
+        <p:txBody>
+          <a:bodyPr wrap="square" lIns="0" tIns="0" rIns="0" bIns="0" rtlCol="0" anchor="ctr"/>
+          <a:lstStyle/>
+          <a:p>
+            <a:pPr algn="ctr" indent="0" marL="0">
+              <a:buNone/>
+            </a:pPr>
+            <a:r>
+              <a:rPr lang="en-US" sz="900" b="1" dirty="0">
+                <a:solidFill>
+                  <a:srgbClr val="9D174D"/>
                 </a:solidFill>
                 <a:latin typeface="Trebuchet MS" pitchFamily="34" charset="0"/>
                 <a:ea typeface="Trebuchet MS" pitchFamily="34" charset="-122"/>
                 <a:cs typeface="Trebuchet MS" pitchFamily="34" charset="-120"/>
               </a:rPr>
-              <a:t>Phonemes</a:t>
-            </a:r>
-            <a:endParaRPr lang="en-US" sz="1100" dirty="0"/>
-          </a:p>
-        </p:txBody>
-      </p:sp>
-      <p:sp>
-        <p:nvSpPr>
-          <p:cNvPr id="41" name="Shape 39"/>
-          <p:cNvSpPr/>
-          <p:nvPr/>
-        </p:nvSpPr>
-        <p:spPr>
-          <a:xfrm>
-            <a:off x="1874520" y="4096512"/>
-            <a:ext cx="6903720" cy="658368"/>
-          </a:xfrm>
-          <a:prstGeom prst="rect">
-            <a:avLst>
-              <a:gd name="adj" fmla="val 8333"/>
-            </a:avLst>
-          </a:prstGeom>
-          <a:solidFill>
-            <a:srgbClr val="FCE7F3"/>
-          </a:solidFill>
-          <a:ln w="12700">
-            <a:solidFill>
-              <a:srgbClr val="DB2777"/>
-            </a:solidFill>
-            <a:prstDash val="solid"/>
-          </a:ln>
-        </p:spPr>
-      </p:sp>
-      <p:sp>
-        <p:nvSpPr>
-          <p:cNvPr id="42" name="Shape 40"/>
-          <p:cNvSpPr/>
-          <p:nvPr/>
-        </p:nvSpPr>
-        <p:spPr>
-          <a:xfrm>
-            <a:off x="2124837" y="4169664"/>
+              <a:t>v</a:t>
+            </a:r>
+            <a:endParaRPr lang="en-US" sz="900" dirty="0"/>
+          </a:p>
+        </p:txBody>
+      </p:sp>
+      <p:sp>
+        <p:nvSpPr>
+          <p:cNvPr id="43" name="Shape 41"/>
+          <p:cNvSpPr/>
+          <p:nvPr/>
+        </p:nvSpPr>
+        <p:spPr>
+          <a:xfrm>
+            <a:off x="3942207" y="4169664"/>
             <a:ext cx="685800" cy="475488"/>
           </a:xfrm>
           <a:prstGeom prst="rect">
@@ -16100,13 +16154,13 @@
       </p:sp>
       <p:sp>
         <p:nvSpPr>
-          <p:cNvPr id="43" name="Text 41"/>
-          <p:cNvSpPr/>
-          <p:nvPr/>
-        </p:nvSpPr>
-        <p:spPr>
-          <a:xfrm>
-            <a:off x="2124837" y="4169664"/>
+          <p:cNvPr id="44" name="Text 42"/>
+          <p:cNvSpPr/>
+          <p:nvPr/>
+        </p:nvSpPr>
+        <p:spPr>
+          <a:xfrm>
+            <a:off x="3942207" y="4169664"/>
             <a:ext cx="685800" cy="475488"/>
           </a:xfrm>
           <a:prstGeom prst="rect">
@@ -16131,7 +16185,7 @@
                 <a:ea typeface="Trebuchet MS" pitchFamily="34" charset="-122"/>
                 <a:cs typeface="Trebuchet MS" pitchFamily="34" charset="-120"/>
               </a:rPr>
-              <a:t>o</a:t>
+              <a:t>er</a:t>
             </a:r>
             <a:endParaRPr lang="en-US" sz="900" dirty="0"/>
           </a:p>
@@ -16139,13 +16193,13 @@
       </p:sp>
       <p:sp>
         <p:nvSpPr>
-          <p:cNvPr id="44" name="Shape 42"/>
-          <p:cNvSpPr/>
-          <p:nvPr/>
-        </p:nvSpPr>
-        <p:spPr>
-          <a:xfrm>
-            <a:off x="3033522" y="4169664"/>
+          <p:cNvPr id="45" name="Shape 43"/>
+          <p:cNvSpPr/>
+          <p:nvPr/>
+        </p:nvSpPr>
+        <p:spPr>
+          <a:xfrm>
+            <a:off x="4850892" y="4169664"/>
             <a:ext cx="685800" cy="475488"/>
           </a:xfrm>
           <a:prstGeom prst="rect">
@@ -16166,13 +16220,13 @@
       </p:sp>
       <p:sp>
         <p:nvSpPr>
-          <p:cNvPr id="45" name="Text 43"/>
-          <p:cNvSpPr/>
-          <p:nvPr/>
-        </p:nvSpPr>
-        <p:spPr>
-          <a:xfrm>
-            <a:off x="3033522" y="4169664"/>
+          <p:cNvPr id="46" name="Text 44"/>
+          <p:cNvSpPr/>
+          <p:nvPr/>
+        </p:nvSpPr>
+        <p:spPr>
+          <a:xfrm>
+            <a:off x="4850892" y="4169664"/>
             <a:ext cx="685800" cy="475488"/>
           </a:xfrm>
           <a:prstGeom prst="rect">
@@ -16197,7 +16251,7 @@
                 <a:ea typeface="Trebuchet MS" pitchFamily="34" charset="-122"/>
                 <a:cs typeface="Trebuchet MS" pitchFamily="34" charset="-120"/>
               </a:rPr>
-              <a:t>v</a:t>
+              <a:t>l</a:t>
             </a:r>
             <a:endParaRPr lang="en-US" sz="900" dirty="0"/>
           </a:p>
@@ -16205,13 +16259,13 @@
       </p:sp>
       <p:sp>
         <p:nvSpPr>
-          <p:cNvPr id="46" name="Shape 44"/>
-          <p:cNvSpPr/>
-          <p:nvPr/>
-        </p:nvSpPr>
-        <p:spPr>
-          <a:xfrm>
-            <a:off x="3942207" y="4169664"/>
+          <p:cNvPr id="47" name="Shape 45"/>
+          <p:cNvSpPr/>
+          <p:nvPr/>
+        </p:nvSpPr>
+        <p:spPr>
+          <a:xfrm>
+            <a:off x="5759577" y="4169664"/>
             <a:ext cx="685800" cy="475488"/>
           </a:xfrm>
           <a:prstGeom prst="rect">
@@ -16232,13 +16286,13 @@
       </p:sp>
       <p:sp>
         <p:nvSpPr>
-          <p:cNvPr id="47" name="Text 45"/>
-          <p:cNvSpPr/>
-          <p:nvPr/>
-        </p:nvSpPr>
-        <p:spPr>
-          <a:xfrm>
-            <a:off x="3942207" y="4169664"/>
+          <p:cNvPr id="48" name="Text 46"/>
+          <p:cNvSpPr/>
+          <p:nvPr/>
+        </p:nvSpPr>
+        <p:spPr>
+          <a:xfrm>
+            <a:off x="5759577" y="4169664"/>
             <a:ext cx="685800" cy="475488"/>
           </a:xfrm>
           <a:prstGeom prst="rect">
@@ -16263,7 +16317,7 @@
                 <a:ea typeface="Trebuchet MS" pitchFamily="34" charset="-122"/>
                 <a:cs typeface="Trebuchet MS" pitchFamily="34" charset="-120"/>
               </a:rPr>
-              <a:t>er</a:t>
+              <a:t>oo</a:t>
             </a:r>
             <a:endParaRPr lang="en-US" sz="900" dirty="0"/>
           </a:p>
@@ -16271,13 +16325,13 @@
       </p:sp>
       <p:sp>
         <p:nvSpPr>
-          <p:cNvPr id="48" name="Shape 46"/>
-          <p:cNvSpPr/>
-          <p:nvPr/>
-        </p:nvSpPr>
-        <p:spPr>
-          <a:xfrm>
-            <a:off x="4850892" y="4169664"/>
+          <p:cNvPr id="49" name="Shape 47"/>
+          <p:cNvSpPr/>
+          <p:nvPr/>
+        </p:nvSpPr>
+        <p:spPr>
+          <a:xfrm>
+            <a:off x="6668262" y="4169664"/>
             <a:ext cx="685800" cy="475488"/>
           </a:xfrm>
           <a:prstGeom prst="rect">
@@ -16298,13 +16352,13 @@
       </p:sp>
       <p:sp>
         <p:nvSpPr>
-          <p:cNvPr id="49" name="Text 47"/>
-          <p:cNvSpPr/>
-          <p:nvPr/>
-        </p:nvSpPr>
-        <p:spPr>
-          <a:xfrm>
-            <a:off x="4850892" y="4169664"/>
+          <p:cNvPr id="50" name="Text 48"/>
+          <p:cNvSpPr/>
+          <p:nvPr/>
+        </p:nvSpPr>
+        <p:spPr>
+          <a:xfrm>
+            <a:off x="6668262" y="4169664"/>
             <a:ext cx="685800" cy="475488"/>
           </a:xfrm>
           <a:prstGeom prst="rect">
@@ -16329,7 +16383,7 @@
                 <a:ea typeface="Trebuchet MS" pitchFamily="34" charset="-122"/>
                 <a:cs typeface="Trebuchet MS" pitchFamily="34" charset="-120"/>
               </a:rPr>
-              <a:t>l</a:t>
+              <a:t>k</a:t>
             </a:r>
             <a:endParaRPr lang="en-US" sz="900" dirty="0"/>
           </a:p>
@@ -16337,13 +16391,13 @@
       </p:sp>
       <p:sp>
         <p:nvSpPr>
-          <p:cNvPr id="50" name="Shape 48"/>
-          <p:cNvSpPr/>
-          <p:nvPr/>
-        </p:nvSpPr>
-        <p:spPr>
-          <a:xfrm>
-            <a:off x="5759577" y="4169664"/>
+          <p:cNvPr id="51" name="Shape 49"/>
+          <p:cNvSpPr/>
+          <p:nvPr/>
+        </p:nvSpPr>
+        <p:spPr>
+          <a:xfrm>
+            <a:off x="7576947" y="4169664"/>
             <a:ext cx="685800" cy="475488"/>
           </a:xfrm>
           <a:prstGeom prst="rect">
@@ -16364,139 +16418,7 @@
       </p:sp>
       <p:sp>
         <p:nvSpPr>
-          <p:cNvPr id="51" name="Text 49"/>
-          <p:cNvSpPr/>
-          <p:nvPr/>
-        </p:nvSpPr>
-        <p:spPr>
-          <a:xfrm>
-            <a:off x="5759577" y="4169664"/>
-            <a:ext cx="685800" cy="475488"/>
-          </a:xfrm>
-          <a:prstGeom prst="rect">
-            <a:avLst/>
-          </a:prstGeom>
-          <a:noFill/>
-          <a:ln/>
-        </p:spPr>
-        <p:txBody>
-          <a:bodyPr wrap="square" lIns="0" tIns="0" rIns="0" bIns="0" rtlCol="0" anchor="ctr"/>
-          <a:lstStyle/>
-          <a:p>
-            <a:pPr algn="ctr" indent="0" marL="0">
-              <a:buNone/>
-            </a:pPr>
-            <a:r>
-              <a:rPr lang="en-US" sz="900" b="1" dirty="0">
-                <a:solidFill>
-                  <a:srgbClr val="9D174D"/>
-                </a:solidFill>
-                <a:latin typeface="Trebuchet MS" pitchFamily="34" charset="0"/>
-                <a:ea typeface="Trebuchet MS" pitchFamily="34" charset="-122"/>
-                <a:cs typeface="Trebuchet MS" pitchFamily="34" charset="-120"/>
-              </a:rPr>
-              <a:t>oa</a:t>
-            </a:r>
-            <a:endParaRPr lang="en-US" sz="900" dirty="0"/>
-          </a:p>
-        </p:txBody>
-      </p:sp>
-      <p:sp>
-        <p:nvSpPr>
-          <p:cNvPr id="52" name="Shape 50"/>
-          <p:cNvSpPr/>
-          <p:nvPr/>
-        </p:nvSpPr>
-        <p:spPr>
-          <a:xfrm>
-            <a:off x="6668262" y="4169664"/>
-            <a:ext cx="685800" cy="475488"/>
-          </a:xfrm>
-          <a:prstGeom prst="rect">
-            <a:avLst>
-              <a:gd name="adj" fmla="val 7692"/>
-            </a:avLst>
-          </a:prstGeom>
-          <a:solidFill>
-            <a:srgbClr val="FFFFFF"/>
-          </a:solidFill>
-          <a:ln w="12700">
-            <a:solidFill>
-              <a:srgbClr val="DB2777"/>
-            </a:solidFill>
-            <a:prstDash val="solid"/>
-          </a:ln>
-        </p:spPr>
-      </p:sp>
-      <p:sp>
-        <p:nvSpPr>
-          <p:cNvPr id="53" name="Text 51"/>
-          <p:cNvSpPr/>
-          <p:nvPr/>
-        </p:nvSpPr>
-        <p:spPr>
-          <a:xfrm>
-            <a:off x="6668262" y="4169664"/>
-            <a:ext cx="685800" cy="475488"/>
-          </a:xfrm>
-          <a:prstGeom prst="rect">
-            <a:avLst/>
-          </a:prstGeom>
-          <a:noFill/>
-          <a:ln/>
-        </p:spPr>
-        <p:txBody>
-          <a:bodyPr wrap="square" lIns="0" tIns="0" rIns="0" bIns="0" rtlCol="0" anchor="ctr"/>
-          <a:lstStyle/>
-          <a:p>
-            <a:pPr algn="ctr" indent="0" marL="0">
-              <a:buNone/>
-            </a:pPr>
-            <a:r>
-              <a:rPr lang="en-US" sz="900" b="1" dirty="0">
-                <a:solidFill>
-                  <a:srgbClr val="9D174D"/>
-                </a:solidFill>
-                <a:latin typeface="Trebuchet MS" pitchFamily="34" charset="0"/>
-                <a:ea typeface="Trebuchet MS" pitchFamily="34" charset="-122"/>
-                <a:cs typeface="Trebuchet MS" pitchFamily="34" charset="-120"/>
-              </a:rPr>
-              <a:t>d</a:t>
-            </a:r>
-            <a:endParaRPr lang="en-US" sz="900" dirty="0"/>
-          </a:p>
-        </p:txBody>
-      </p:sp>
-      <p:sp>
-        <p:nvSpPr>
-          <p:cNvPr id="54" name="Shape 52"/>
-          <p:cNvSpPr/>
-          <p:nvPr/>
-        </p:nvSpPr>
-        <p:spPr>
-          <a:xfrm>
-            <a:off x="7576947" y="4169664"/>
-            <a:ext cx="685800" cy="475488"/>
-          </a:xfrm>
-          <a:prstGeom prst="rect">
-            <a:avLst>
-              <a:gd name="adj" fmla="val 7692"/>
-            </a:avLst>
-          </a:prstGeom>
-          <a:solidFill>
-            <a:srgbClr val="FFFFFF"/>
-          </a:solidFill>
-          <a:ln w="12700">
-            <a:solidFill>
-              <a:srgbClr val="DB2777"/>
-            </a:solidFill>
-            <a:prstDash val="solid"/>
-          </a:ln>
-        </p:spPr>
-      </p:sp>
-      <p:sp>
-        <p:nvSpPr>
-          <p:cNvPr id="55" name="Text 53"/>
+          <p:cNvPr id="52" name="Text 50"/>
           <p:cNvSpPr/>
           <p:nvPr/>
         </p:nvSpPr>
@@ -17853,7 +17775,7 @@
                 <a:ea typeface="Calibri" pitchFamily="34" charset="-122"/>
                 <a:cs typeface="Calibri" pitchFamily="34" charset="-120"/>
               </a:rPr>
-              <a:t>She had </a:t>
+              <a:t>The river </a:t>
             </a:r>
             <a:pPr algn="l" indent="0" marL="0">
               <a:buNone/>
@@ -17870,7 +17792,7 @@
                 <a:ea typeface="Calibri" pitchFamily="34" charset="-122"/>
                 <a:cs typeface="Calibri" pitchFamily="34" charset="-120"/>
               </a:rPr>
-              <a:t>overslept</a:t>
+              <a:t>overflowed</a:t>
             </a:r>
             <a:pPr algn="l" indent="0" marL="0">
               <a:buNone/>
@@ -17884,7 +17806,7 @@
                 <a:ea typeface="Calibri" pitchFamily="34" charset="-122"/>
                 <a:cs typeface="Calibri" pitchFamily="34" charset="-120"/>
               </a:rPr>
-              <a:t>, but she quickly </a:t>
+              <a:t> its banks, and the rescue team had to </a:t>
             </a:r>
             <a:pPr algn="l" indent="0" marL="0">
               <a:buNone/>
@@ -17901,7 +17823,7 @@
                 <a:ea typeface="Calibri" pitchFamily="34" charset="-122"/>
                 <a:cs typeface="Calibri" pitchFamily="34" charset="-120"/>
               </a:rPr>
-              <a:t>overcame</a:t>
+              <a:t>overcome</a:t>
             </a:r>
             <a:pPr algn="l" indent="0" marL="0">
               <a:buNone/>
@@ -17915,7 +17837,7 @@
                 <a:ea typeface="Calibri" pitchFamily="34" charset="-122"/>
                 <a:cs typeface="Calibri" pitchFamily="34" charset="-120"/>
               </a:rPr>
-              <a:t> her panic and, after glancing at the </a:t>
+              <a:t> the strong current to reach the </a:t>
             </a:r>
             <a:pPr algn="l" indent="0" marL="0">
               <a:buNone/>
@@ -17932,7 +17854,7 @@
                 <a:ea typeface="Calibri" pitchFamily="34" charset="-122"/>
                 <a:cs typeface="Calibri" pitchFamily="34" charset="-120"/>
               </a:rPr>
-              <a:t>overflowing</a:t>
+              <a:t>overjoyed</a:t>
             </a:r>
             <a:pPr algn="l" indent="0" marL="0">
               <a:buNone/>
@@ -17946,7 +17868,7 @@
                 <a:ea typeface="Calibri" pitchFamily="34" charset="-122"/>
                 <a:cs typeface="Calibri" pitchFamily="34" charset="-120"/>
               </a:rPr>
-              <a:t> sink, rushed to get ready.</a:t>
+              <a:t> survivors.</a:t>
             </a:r>
             <a:endParaRPr lang="en-US" sz="1800" dirty="0"/>
           </a:p>
@@ -18101,7 +18023,7 @@
                 <a:ea typeface="Trebuchet MS" pitchFamily="34" charset="-122"/>
                 <a:cs typeface="Trebuchet MS" pitchFamily="34" charset="-120"/>
               </a:rPr>
-              <a:t>overslept</a:t>
+              <a:t>overflowed</a:t>
             </a:r>
             <a:endParaRPr lang="en-US" sz="1400" dirty="0"/>
           </a:p>
@@ -18229,7 +18151,7 @@
                 <a:ea typeface="Trebuchet MS" pitchFamily="34" charset="-122"/>
                 <a:cs typeface="Trebuchet MS" pitchFamily="34" charset="-120"/>
               </a:rPr>
-              <a:t>overcame</a:t>
+              <a:t>overcome</a:t>
             </a:r>
             <a:endParaRPr lang="en-US" sz="1400" dirty="0"/>
           </a:p>
@@ -18357,7 +18279,7 @@
                 <a:ea typeface="Trebuchet MS" pitchFamily="34" charset="-122"/>
                 <a:cs typeface="Trebuchet MS" pitchFamily="34" charset="-120"/>
               </a:rPr>
-              <a:t>overflowing</a:t>
+              <a:t>overjoyed</a:t>
             </a:r>
             <a:endParaRPr lang="en-US" sz="1400" dirty="0"/>
           </a:p>
@@ -18827,7 +18749,7 @@
                 <a:ea typeface="Trebuchet MS" pitchFamily="34" charset="-122"/>
                 <a:cs typeface="Trebuchet MS" pitchFamily="34" charset="-120"/>
               </a:rPr>
-              <a:t>overslept</a:t>
+              <a:t>overflowed</a:t>
             </a:r>
             <a:endParaRPr lang="en-US" sz="2800" dirty="0"/>
           </a:p>
@@ -19654,7 +19576,7 @@
                 <a:ea typeface="Trebuchet MS" pitchFamily="34" charset="-122"/>
                 <a:cs typeface="Trebuchet MS" pitchFamily="34" charset="-120"/>
               </a:rPr>
-              <a:t>overslept</a:t>
+              <a:t>overflowed</a:t>
             </a:r>
             <a:endParaRPr lang="en-US" sz="2800" dirty="0"/>
           </a:p>
@@ -19734,7 +19656,7 @@
         </p:nvSpPr>
         <p:spPr>
           <a:xfrm>
-            <a:off x="2938272" y="2258568"/>
+            <a:off x="2221992" y="2258568"/>
             <a:ext cx="1828800" cy="292608"/>
           </a:xfrm>
           <a:prstGeom prst="rect">
@@ -19768,7 +19690,7 @@
         </p:nvSpPr>
         <p:spPr>
           <a:xfrm>
-            <a:off x="2938272" y="2258568"/>
+            <a:off x="2221992" y="2258568"/>
             <a:ext cx="1828800" cy="292608"/>
           </a:xfrm>
           <a:prstGeom prst="rect">
@@ -19807,7 +19729,7 @@
         </p:nvSpPr>
         <p:spPr>
           <a:xfrm>
-            <a:off x="2938272" y="2569464"/>
+            <a:off x="2221992" y="2569464"/>
             <a:ext cx="1828800" cy="201168"/>
           </a:xfrm>
           <a:prstGeom prst="rect">
@@ -19832,7 +19754,7 @@
                 <a:ea typeface="Calibri" pitchFamily="34" charset="-122"/>
                 <a:cs typeface="Calibri" pitchFamily="34" charset="-120"/>
               </a:rPr>
-              <a:t>too much</a:t>
+              <a:t>above / beyond</a:t>
             </a:r>
             <a:endParaRPr lang="en-US" sz="850" dirty="0"/>
           </a:p>
@@ -19846,7 +19768,7 @@
         </p:nvSpPr>
         <p:spPr>
           <a:xfrm>
-            <a:off x="5803392" y="2258568"/>
+            <a:off x="4370832" y="2258568"/>
             <a:ext cx="1828800" cy="292608"/>
           </a:xfrm>
           <a:prstGeom prst="rect">
@@ -19880,7 +19802,7 @@
         </p:nvSpPr>
         <p:spPr>
           <a:xfrm>
-            <a:off x="5803392" y="2258568"/>
+            <a:off x="4370832" y="2258568"/>
             <a:ext cx="1828800" cy="292608"/>
           </a:xfrm>
           <a:prstGeom prst="rect">
@@ -19905,7 +19827,7 @@
                 <a:ea typeface="Trebuchet MS" pitchFamily="34" charset="-122"/>
                 <a:cs typeface="Trebuchet MS" pitchFamily="34" charset="-120"/>
               </a:rPr>
-              <a:t>slept</a:t>
+              <a:t>flow</a:t>
             </a:r>
             <a:endParaRPr lang="en-US" sz="1300" dirty="0"/>
           </a:p>
@@ -19919,7 +19841,7 @@
         </p:nvSpPr>
         <p:spPr>
           <a:xfrm>
-            <a:off x="5803392" y="2569464"/>
+            <a:off x="4370832" y="2569464"/>
             <a:ext cx="1828800" cy="201168"/>
           </a:xfrm>
           <a:prstGeom prst="rect">
@@ -19944,7 +19866,7 @@
                 <a:ea typeface="Calibri" pitchFamily="34" charset="-122"/>
                 <a:cs typeface="Calibri" pitchFamily="34" charset="-120"/>
               </a:rPr>
-              <a:t>past tense of sleep</a:t>
+              <a:t>to move like water</a:t>
             </a:r>
             <a:endParaRPr lang="en-US" sz="850" dirty="0"/>
           </a:p>
@@ -19953,6 +19875,118 @@
       <p:sp>
         <p:nvSpPr>
           <p:cNvPr id="22" name="Shape 20"/>
+          <p:cNvSpPr/>
+          <p:nvPr/>
+        </p:nvSpPr>
+        <p:spPr>
+          <a:xfrm>
+            <a:off x="6519672" y="2258568"/>
+            <a:ext cx="1828800" cy="292608"/>
+          </a:xfrm>
+          <a:prstGeom prst="rect">
+            <a:avLst>
+              <a:gd name="adj" fmla="val 25000"/>
+            </a:avLst>
+          </a:prstGeom>
+          <a:solidFill>
+            <a:srgbClr val="FCE7F3"/>
+          </a:solidFill>
+          <a:ln w="19050">
+            <a:solidFill>
+              <a:srgbClr val="DB2777"/>
+            </a:solidFill>
+            <a:prstDash val="solid"/>
+          </a:ln>
+          <a:effectLst>
+            <a:outerShdw sx="100000" sy="100000" kx="0" ky="0" algn="bl" rotWithShape="0" blurRad="101600" dist="38100" dir="8100000">
+              <a:srgbClr val="000000">
+                <a:alpha val="12000"/>
+              </a:srgbClr>
+            </a:outerShdw>
+          </a:effectLst>
+        </p:spPr>
+      </p:sp>
+      <p:sp>
+        <p:nvSpPr>
+          <p:cNvPr id="23" name="Text 21"/>
+          <p:cNvSpPr/>
+          <p:nvPr/>
+        </p:nvSpPr>
+        <p:spPr>
+          <a:xfrm>
+            <a:off x="6519672" y="2258568"/>
+            <a:ext cx="1828800" cy="292608"/>
+          </a:xfrm>
+          <a:prstGeom prst="rect">
+            <a:avLst/>
+          </a:prstGeom>
+          <a:noFill/>
+          <a:ln/>
+        </p:spPr>
+        <p:txBody>
+          <a:bodyPr wrap="square" lIns="0" tIns="0" rIns="0" bIns="0" rtlCol="0" anchor="ctr"/>
+          <a:lstStyle/>
+          <a:p>
+            <a:pPr algn="ctr" indent="0" marL="0">
+              <a:buNone/>
+            </a:pPr>
+            <a:r>
+              <a:rPr lang="en-US" sz="1300" b="1" dirty="0">
+                <a:solidFill>
+                  <a:srgbClr val="9D174D"/>
+                </a:solidFill>
+                <a:latin typeface="Trebuchet MS" pitchFamily="34" charset="0"/>
+                <a:ea typeface="Trebuchet MS" pitchFamily="34" charset="-122"/>
+                <a:cs typeface="Trebuchet MS" pitchFamily="34" charset="-120"/>
+              </a:rPr>
+              <a:t>ed</a:t>
+            </a:r>
+            <a:endParaRPr lang="en-US" sz="1300" dirty="0"/>
+          </a:p>
+        </p:txBody>
+      </p:sp>
+      <p:sp>
+        <p:nvSpPr>
+          <p:cNvPr id="24" name="Text 22"/>
+          <p:cNvSpPr/>
+          <p:nvPr/>
+        </p:nvSpPr>
+        <p:spPr>
+          <a:xfrm>
+            <a:off x="6519672" y="2569464"/>
+            <a:ext cx="1828800" cy="201168"/>
+          </a:xfrm>
+          <a:prstGeom prst="rect">
+            <a:avLst/>
+          </a:prstGeom>
+          <a:noFill/>
+          <a:ln/>
+        </p:spPr>
+        <p:txBody>
+          <a:bodyPr wrap="square" lIns="0" tIns="0" rIns="0" bIns="0" rtlCol="0" anchor="t"/>
+          <a:lstStyle/>
+          <a:p>
+            <a:pPr algn="ctr" indent="0" marL="0">
+              <a:buNone/>
+            </a:pPr>
+            <a:r>
+              <a:rPr lang="en-US" sz="850" dirty="0">
+                <a:solidFill>
+                  <a:srgbClr val="475569"/>
+                </a:solidFill>
+                <a:latin typeface="Calibri" pitchFamily="34" charset="0"/>
+                <a:ea typeface="Calibri" pitchFamily="34" charset="-122"/>
+                <a:cs typeface="Calibri" pitchFamily="34" charset="-120"/>
+              </a:rPr>
+              <a:t>past tense</a:t>
+            </a:r>
+            <a:endParaRPr lang="en-US" sz="850" dirty="0"/>
+          </a:p>
+        </p:txBody>
+      </p:sp>
+      <p:sp>
+        <p:nvSpPr>
+          <p:cNvPr id="25" name="Shape 23"/>
           <p:cNvSpPr/>
           <p:nvPr/>
         </p:nvSpPr>
@@ -19979,7 +20013,7 @@
       </p:sp>
       <p:sp>
         <p:nvSpPr>
-          <p:cNvPr id="23" name="Text 21"/>
+          <p:cNvPr id="26" name="Text 24"/>
           <p:cNvSpPr/>
           <p:nvPr/>
         </p:nvSpPr>
@@ -20018,7 +20052,7 @@
       </p:sp>
       <p:sp>
         <p:nvSpPr>
-          <p:cNvPr id="24" name="Shape 22"/>
+          <p:cNvPr id="27" name="Shape 25"/>
           <p:cNvSpPr/>
           <p:nvPr/>
         </p:nvSpPr>
@@ -20045,7 +20079,7 @@
       </p:sp>
       <p:sp>
         <p:nvSpPr>
-          <p:cNvPr id="25" name="Text 23"/>
+          <p:cNvPr id="28" name="Text 26"/>
           <p:cNvSpPr/>
           <p:nvPr/>
         </p:nvSpPr>
@@ -20084,7 +20118,7 @@
       </p:sp>
       <p:sp>
         <p:nvSpPr>
-          <p:cNvPr id="26" name="Shape 24"/>
+          <p:cNvPr id="29" name="Shape 27"/>
           <p:cNvSpPr/>
           <p:nvPr/>
         </p:nvSpPr>
@@ -20111,7 +20145,7 @@
       </p:sp>
       <p:sp>
         <p:nvSpPr>
-          <p:cNvPr id="27" name="Text 25"/>
+          <p:cNvPr id="30" name="Text 28"/>
           <p:cNvSpPr/>
           <p:nvPr/>
         </p:nvSpPr>
@@ -20150,7 +20184,7 @@
       </p:sp>
       <p:sp>
         <p:nvSpPr>
-          <p:cNvPr id="28" name="Shape 26"/>
+          <p:cNvPr id="31" name="Shape 29"/>
           <p:cNvSpPr/>
           <p:nvPr/>
         </p:nvSpPr>
@@ -20177,7 +20211,7 @@
       </p:sp>
       <p:sp>
         <p:nvSpPr>
-          <p:cNvPr id="29" name="Text 27"/>
+          <p:cNvPr id="32" name="Text 30"/>
           <p:cNvSpPr/>
           <p:nvPr/>
         </p:nvSpPr>
@@ -20639,7 +20673,7 @@
                 <a:ea typeface="Trebuchet MS" pitchFamily="34" charset="-122"/>
                 <a:cs typeface="Trebuchet MS" pitchFamily="34" charset="-120"/>
               </a:rPr>
-              <a:t>overslept</a:t>
+              <a:t>overflowed</a:t>
             </a:r>
             <a:endParaRPr lang="en-US" sz="2800" dirty="0"/>
           </a:p>
@@ -20719,7 +20753,7 @@
         </p:nvSpPr>
         <p:spPr>
           <a:xfrm>
-            <a:off x="2938272" y="2258568"/>
+            <a:off x="2221992" y="2258568"/>
             <a:ext cx="1828800" cy="292608"/>
           </a:xfrm>
           <a:prstGeom prst="rect">
@@ -20753,7 +20787,7 @@
         </p:nvSpPr>
         <p:spPr>
           <a:xfrm>
-            <a:off x="2938272" y="2258568"/>
+            <a:off x="2221992" y="2258568"/>
             <a:ext cx="1828800" cy="292608"/>
           </a:xfrm>
           <a:prstGeom prst="rect">
@@ -20792,7 +20826,7 @@
         </p:nvSpPr>
         <p:spPr>
           <a:xfrm>
-            <a:off x="2938272" y="2569464"/>
+            <a:off x="2221992" y="2569464"/>
             <a:ext cx="1828800" cy="201168"/>
           </a:xfrm>
           <a:prstGeom prst="rect">
@@ -20817,7 +20851,7 @@
                 <a:ea typeface="Calibri" pitchFamily="34" charset="-122"/>
                 <a:cs typeface="Calibri" pitchFamily="34" charset="-120"/>
               </a:rPr>
-              <a:t>too much</a:t>
+              <a:t>above / beyond</a:t>
             </a:r>
             <a:endParaRPr lang="en-US" sz="850" dirty="0"/>
           </a:p>
@@ -20831,7 +20865,7 @@
         </p:nvSpPr>
         <p:spPr>
           <a:xfrm>
-            <a:off x="5803392" y="2258568"/>
+            <a:off x="4370832" y="2258568"/>
             <a:ext cx="1828800" cy="292608"/>
           </a:xfrm>
           <a:prstGeom prst="rect">
@@ -20865,7 +20899,7 @@
         </p:nvSpPr>
         <p:spPr>
           <a:xfrm>
-            <a:off x="5803392" y="2258568"/>
+            <a:off x="4370832" y="2258568"/>
             <a:ext cx="1828800" cy="292608"/>
           </a:xfrm>
           <a:prstGeom prst="rect">
@@ -20890,7 +20924,7 @@
                 <a:ea typeface="Trebuchet MS" pitchFamily="34" charset="-122"/>
                 <a:cs typeface="Trebuchet MS" pitchFamily="34" charset="-120"/>
               </a:rPr>
-              <a:t>slept</a:t>
+              <a:t>flow</a:t>
             </a:r>
             <a:endParaRPr lang="en-US" sz="1300" dirty="0"/>
           </a:p>
@@ -20904,7 +20938,7 @@
         </p:nvSpPr>
         <p:spPr>
           <a:xfrm>
-            <a:off x="5803392" y="2569464"/>
+            <a:off x="4370832" y="2569464"/>
             <a:ext cx="1828800" cy="201168"/>
           </a:xfrm>
           <a:prstGeom prst="rect">
@@ -20929,7 +20963,7 @@
                 <a:ea typeface="Calibri" pitchFamily="34" charset="-122"/>
                 <a:cs typeface="Calibri" pitchFamily="34" charset="-120"/>
               </a:rPr>
-              <a:t>past tense of sleep</a:t>
+              <a:t>to move like water</a:t>
             </a:r>
             <a:endParaRPr lang="en-US" sz="850" dirty="0"/>
           </a:p>
@@ -20938,6 +20972,118 @@
       <p:sp>
         <p:nvSpPr>
           <p:cNvPr id="22" name="Shape 20"/>
+          <p:cNvSpPr/>
+          <p:nvPr/>
+        </p:nvSpPr>
+        <p:spPr>
+          <a:xfrm>
+            <a:off x="6519672" y="2258568"/>
+            <a:ext cx="1828800" cy="292608"/>
+          </a:xfrm>
+          <a:prstGeom prst="rect">
+            <a:avLst>
+              <a:gd name="adj" fmla="val 25000"/>
+            </a:avLst>
+          </a:prstGeom>
+          <a:solidFill>
+            <a:srgbClr val="FCE7F3"/>
+          </a:solidFill>
+          <a:ln w="19050">
+            <a:solidFill>
+              <a:srgbClr val="DB2777"/>
+            </a:solidFill>
+            <a:prstDash val="solid"/>
+          </a:ln>
+          <a:effectLst>
+            <a:outerShdw sx="100000" sy="100000" kx="0" ky="0" algn="bl" rotWithShape="0" blurRad="101600" dist="38100" dir="8100000">
+              <a:srgbClr val="000000">
+                <a:alpha val="12000"/>
+              </a:srgbClr>
+            </a:outerShdw>
+          </a:effectLst>
+        </p:spPr>
+      </p:sp>
+      <p:sp>
+        <p:nvSpPr>
+          <p:cNvPr id="23" name="Text 21"/>
+          <p:cNvSpPr/>
+          <p:nvPr/>
+        </p:nvSpPr>
+        <p:spPr>
+          <a:xfrm>
+            <a:off x="6519672" y="2258568"/>
+            <a:ext cx="1828800" cy="292608"/>
+          </a:xfrm>
+          <a:prstGeom prst="rect">
+            <a:avLst/>
+          </a:prstGeom>
+          <a:noFill/>
+          <a:ln/>
+        </p:spPr>
+        <p:txBody>
+          <a:bodyPr wrap="square" lIns="0" tIns="0" rIns="0" bIns="0" rtlCol="0" anchor="ctr"/>
+          <a:lstStyle/>
+          <a:p>
+            <a:pPr algn="ctr" indent="0" marL="0">
+              <a:buNone/>
+            </a:pPr>
+            <a:r>
+              <a:rPr lang="en-US" sz="1300" b="1" dirty="0">
+                <a:solidFill>
+                  <a:srgbClr val="9D174D"/>
+                </a:solidFill>
+                <a:latin typeface="Trebuchet MS" pitchFamily="34" charset="0"/>
+                <a:ea typeface="Trebuchet MS" pitchFamily="34" charset="-122"/>
+                <a:cs typeface="Trebuchet MS" pitchFamily="34" charset="-120"/>
+              </a:rPr>
+              <a:t>ed</a:t>
+            </a:r>
+            <a:endParaRPr lang="en-US" sz="1300" dirty="0"/>
+          </a:p>
+        </p:txBody>
+      </p:sp>
+      <p:sp>
+        <p:nvSpPr>
+          <p:cNvPr id="24" name="Text 22"/>
+          <p:cNvSpPr/>
+          <p:nvPr/>
+        </p:nvSpPr>
+        <p:spPr>
+          <a:xfrm>
+            <a:off x="6519672" y="2569464"/>
+            <a:ext cx="1828800" cy="201168"/>
+          </a:xfrm>
+          <a:prstGeom prst="rect">
+            <a:avLst/>
+          </a:prstGeom>
+          <a:noFill/>
+          <a:ln/>
+        </p:spPr>
+        <p:txBody>
+          <a:bodyPr wrap="square" lIns="0" tIns="0" rIns="0" bIns="0" rtlCol="0" anchor="t"/>
+          <a:lstStyle/>
+          <a:p>
+            <a:pPr algn="ctr" indent="0" marL="0">
+              <a:buNone/>
+            </a:pPr>
+            <a:r>
+              <a:rPr lang="en-US" sz="850" dirty="0">
+                <a:solidFill>
+                  <a:srgbClr val="475569"/>
+                </a:solidFill>
+                <a:latin typeface="Calibri" pitchFamily="34" charset="0"/>
+                <a:ea typeface="Calibri" pitchFamily="34" charset="-122"/>
+                <a:cs typeface="Calibri" pitchFamily="34" charset="-120"/>
+              </a:rPr>
+              <a:t>past tense</a:t>
+            </a:r>
+            <a:endParaRPr lang="en-US" sz="850" dirty="0"/>
+          </a:p>
+        </p:txBody>
+      </p:sp>
+      <p:sp>
+        <p:nvSpPr>
+          <p:cNvPr id="25" name="Shape 23"/>
           <p:cNvSpPr/>
           <p:nvPr/>
         </p:nvSpPr>
@@ -20964,7 +21110,7 @@
       </p:sp>
       <p:sp>
         <p:nvSpPr>
-          <p:cNvPr id="23" name="Text 21"/>
+          <p:cNvPr id="26" name="Text 24"/>
           <p:cNvSpPr/>
           <p:nvPr/>
         </p:nvSpPr>
@@ -21003,7 +21149,7 @@
       </p:sp>
       <p:sp>
         <p:nvSpPr>
-          <p:cNvPr id="24" name="Shape 22"/>
+          <p:cNvPr id="27" name="Shape 25"/>
           <p:cNvSpPr/>
           <p:nvPr/>
         </p:nvSpPr>
@@ -21030,7 +21176,7 @@
       </p:sp>
       <p:sp>
         <p:nvSpPr>
-          <p:cNvPr id="25" name="Shape 23"/>
+          <p:cNvPr id="28" name="Shape 26"/>
           <p:cNvSpPr/>
           <p:nvPr/>
         </p:nvSpPr>
@@ -21057,7 +21203,7 @@
       </p:sp>
       <p:sp>
         <p:nvSpPr>
-          <p:cNvPr id="26" name="Text 24"/>
+          <p:cNvPr id="29" name="Text 27"/>
           <p:cNvSpPr/>
           <p:nvPr/>
         </p:nvSpPr>
@@ -21096,7 +21242,7 @@
       </p:sp>
       <p:sp>
         <p:nvSpPr>
-          <p:cNvPr id="27" name="Text 25"/>
+          <p:cNvPr id="30" name="Text 28"/>
           <p:cNvSpPr/>
           <p:nvPr/>
         </p:nvSpPr>
@@ -21135,7 +21281,7 @@
       </p:sp>
       <p:sp>
         <p:nvSpPr>
-          <p:cNvPr id="28" name="Shape 26"/>
+          <p:cNvPr id="31" name="Shape 29"/>
           <p:cNvSpPr/>
           <p:nvPr/>
         </p:nvSpPr>
@@ -21162,7 +21308,7 @@
       </p:sp>
       <p:sp>
         <p:nvSpPr>
-          <p:cNvPr id="29" name="Text 27"/>
+          <p:cNvPr id="32" name="Text 30"/>
           <p:cNvSpPr/>
           <p:nvPr/>
         </p:nvSpPr>
@@ -21201,7 +21347,7 @@
       </p:sp>
       <p:sp>
         <p:nvSpPr>
-          <p:cNvPr id="30" name="Text 28"/>
+          <p:cNvPr id="33" name="Text 31"/>
           <p:cNvSpPr/>
           <p:nvPr/>
         </p:nvSpPr>
@@ -21240,7 +21386,7 @@
       </p:sp>
       <p:sp>
         <p:nvSpPr>
-          <p:cNvPr id="31" name="Shape 29"/>
+          <p:cNvPr id="34" name="Shape 32"/>
           <p:cNvSpPr/>
           <p:nvPr/>
         </p:nvSpPr>
@@ -21267,7 +21413,7 @@
       </p:sp>
       <p:sp>
         <p:nvSpPr>
-          <p:cNvPr id="32" name="Text 30"/>
+          <p:cNvPr id="35" name="Text 33"/>
           <p:cNvSpPr/>
           <p:nvPr/>
         </p:nvSpPr>
@@ -21298,7 +21444,7 @@
                 <a:ea typeface="Trebuchet MS" pitchFamily="34" charset="-122"/>
                 <a:cs typeface="Trebuchet MS" pitchFamily="34" charset="-120"/>
               </a:rPr>
-              <a:t>slept</a:t>
+              <a:t>flowed</a:t>
             </a:r>
             <a:endParaRPr lang="en-US" sz="1400" dirty="0"/>
           </a:p>
@@ -21306,7 +21452,7 @@
       </p:sp>
       <p:sp>
         <p:nvSpPr>
-          <p:cNvPr id="33" name="Shape 31"/>
+          <p:cNvPr id="36" name="Shape 34"/>
           <p:cNvSpPr/>
           <p:nvPr/>
         </p:nvSpPr>
@@ -21333,7 +21479,7 @@
       </p:sp>
       <p:sp>
         <p:nvSpPr>
-          <p:cNvPr id="34" name="Text 32"/>
+          <p:cNvPr id="37" name="Text 35"/>
           <p:cNvSpPr/>
           <p:nvPr/>
         </p:nvSpPr>
@@ -21372,7 +21518,7 @@
       </p:sp>
       <p:sp>
         <p:nvSpPr>
-          <p:cNvPr id="35" name="Shape 33"/>
+          <p:cNvPr id="38" name="Shape 36"/>
           <p:cNvSpPr/>
           <p:nvPr/>
         </p:nvSpPr>
@@ -21399,7 +21545,7 @@
       </p:sp>
       <p:sp>
         <p:nvSpPr>
-          <p:cNvPr id="36" name="Text 34"/>
+          <p:cNvPr id="39" name="Text 37"/>
           <p:cNvSpPr/>
           <p:nvPr/>
         </p:nvSpPr>
@@ -21861,7 +22007,7 @@
                 <a:ea typeface="Trebuchet MS" pitchFamily="34" charset="-122"/>
                 <a:cs typeface="Trebuchet MS" pitchFamily="34" charset="-120"/>
               </a:rPr>
-              <a:t>overslept</a:t>
+              <a:t>overflowed</a:t>
             </a:r>
             <a:endParaRPr lang="en-US" sz="2800" dirty="0"/>
           </a:p>
@@ -21941,7 +22087,7 @@
         </p:nvSpPr>
         <p:spPr>
           <a:xfrm>
-            <a:off x="2938272" y="2258568"/>
+            <a:off x="2221992" y="2258568"/>
             <a:ext cx="1828800" cy="292608"/>
           </a:xfrm>
           <a:prstGeom prst="rect">
@@ -21975,7 +22121,7 @@
         </p:nvSpPr>
         <p:spPr>
           <a:xfrm>
-            <a:off x="2938272" y="2258568"/>
+            <a:off x="2221992" y="2258568"/>
             <a:ext cx="1828800" cy="292608"/>
           </a:xfrm>
           <a:prstGeom prst="rect">
@@ -22014,7 +22160,7 @@
         </p:nvSpPr>
         <p:spPr>
           <a:xfrm>
-            <a:off x="2938272" y="2569464"/>
+            <a:off x="2221992" y="2569464"/>
             <a:ext cx="1828800" cy="201168"/>
           </a:xfrm>
           <a:prstGeom prst="rect">
@@ -22039,7 +22185,7 @@
                 <a:ea typeface="Calibri" pitchFamily="34" charset="-122"/>
                 <a:cs typeface="Calibri" pitchFamily="34" charset="-120"/>
               </a:rPr>
-              <a:t>too much</a:t>
+              <a:t>above / beyond</a:t>
             </a:r>
             <a:endParaRPr lang="en-US" sz="850" dirty="0"/>
           </a:p>
@@ -22053,7 +22199,7 @@
         </p:nvSpPr>
         <p:spPr>
           <a:xfrm>
-            <a:off x="5803392" y="2258568"/>
+            <a:off x="4370832" y="2258568"/>
             <a:ext cx="1828800" cy="292608"/>
           </a:xfrm>
           <a:prstGeom prst="rect">
@@ -22087,7 +22233,7 @@
         </p:nvSpPr>
         <p:spPr>
           <a:xfrm>
-            <a:off x="5803392" y="2258568"/>
+            <a:off x="4370832" y="2258568"/>
             <a:ext cx="1828800" cy="292608"/>
           </a:xfrm>
           <a:prstGeom prst="rect">
@@ -22112,7 +22258,7 @@
                 <a:ea typeface="Trebuchet MS" pitchFamily="34" charset="-122"/>
                 <a:cs typeface="Trebuchet MS" pitchFamily="34" charset="-120"/>
               </a:rPr>
-              <a:t>slept</a:t>
+              <a:t>flow</a:t>
             </a:r>
             <a:endParaRPr lang="en-US" sz="1300" dirty="0"/>
           </a:p>
@@ -22126,7 +22272,7 @@
         </p:nvSpPr>
         <p:spPr>
           <a:xfrm>
-            <a:off x="5803392" y="2569464"/>
+            <a:off x="4370832" y="2569464"/>
             <a:ext cx="1828800" cy="201168"/>
           </a:xfrm>
           <a:prstGeom prst="rect">
@@ -22151,7 +22297,7 @@
                 <a:ea typeface="Calibri" pitchFamily="34" charset="-122"/>
                 <a:cs typeface="Calibri" pitchFamily="34" charset="-120"/>
               </a:rPr>
-              <a:t>past tense of sleep</a:t>
+              <a:t>to move like water</a:t>
             </a:r>
             <a:endParaRPr lang="en-US" sz="850" dirty="0"/>
           </a:p>
@@ -22160,6 +22306,118 @@
       <p:sp>
         <p:nvSpPr>
           <p:cNvPr id="22" name="Shape 20"/>
+          <p:cNvSpPr/>
+          <p:nvPr/>
+        </p:nvSpPr>
+        <p:spPr>
+          <a:xfrm>
+            <a:off x="6519672" y="2258568"/>
+            <a:ext cx="1828800" cy="292608"/>
+          </a:xfrm>
+          <a:prstGeom prst="rect">
+            <a:avLst>
+              <a:gd name="adj" fmla="val 25000"/>
+            </a:avLst>
+          </a:prstGeom>
+          <a:solidFill>
+            <a:srgbClr val="FCE7F3"/>
+          </a:solidFill>
+          <a:ln w="19050">
+            <a:solidFill>
+              <a:srgbClr val="DB2777"/>
+            </a:solidFill>
+            <a:prstDash val="solid"/>
+          </a:ln>
+          <a:effectLst>
+            <a:outerShdw sx="100000" sy="100000" kx="0" ky="0" algn="bl" rotWithShape="0" blurRad="101600" dist="38100" dir="8100000">
+              <a:srgbClr val="000000">
+                <a:alpha val="12000"/>
+              </a:srgbClr>
+            </a:outerShdw>
+          </a:effectLst>
+        </p:spPr>
+      </p:sp>
+      <p:sp>
+        <p:nvSpPr>
+          <p:cNvPr id="23" name="Text 21"/>
+          <p:cNvSpPr/>
+          <p:nvPr/>
+        </p:nvSpPr>
+        <p:spPr>
+          <a:xfrm>
+            <a:off x="6519672" y="2258568"/>
+            <a:ext cx="1828800" cy="292608"/>
+          </a:xfrm>
+          <a:prstGeom prst="rect">
+            <a:avLst/>
+          </a:prstGeom>
+          <a:noFill/>
+          <a:ln/>
+        </p:spPr>
+        <p:txBody>
+          <a:bodyPr wrap="square" lIns="0" tIns="0" rIns="0" bIns="0" rtlCol="0" anchor="ctr"/>
+          <a:lstStyle/>
+          <a:p>
+            <a:pPr algn="ctr" indent="0" marL="0">
+              <a:buNone/>
+            </a:pPr>
+            <a:r>
+              <a:rPr lang="en-US" sz="1300" b="1" dirty="0">
+                <a:solidFill>
+                  <a:srgbClr val="9D174D"/>
+                </a:solidFill>
+                <a:latin typeface="Trebuchet MS" pitchFamily="34" charset="0"/>
+                <a:ea typeface="Trebuchet MS" pitchFamily="34" charset="-122"/>
+                <a:cs typeface="Trebuchet MS" pitchFamily="34" charset="-120"/>
+              </a:rPr>
+              <a:t>ed</a:t>
+            </a:r>
+            <a:endParaRPr lang="en-US" sz="1300" dirty="0"/>
+          </a:p>
+        </p:txBody>
+      </p:sp>
+      <p:sp>
+        <p:nvSpPr>
+          <p:cNvPr id="24" name="Text 22"/>
+          <p:cNvSpPr/>
+          <p:nvPr/>
+        </p:nvSpPr>
+        <p:spPr>
+          <a:xfrm>
+            <a:off x="6519672" y="2569464"/>
+            <a:ext cx="1828800" cy="201168"/>
+          </a:xfrm>
+          <a:prstGeom prst="rect">
+            <a:avLst/>
+          </a:prstGeom>
+          <a:noFill/>
+          <a:ln/>
+        </p:spPr>
+        <p:txBody>
+          <a:bodyPr wrap="square" lIns="0" tIns="0" rIns="0" bIns="0" rtlCol="0" anchor="t"/>
+          <a:lstStyle/>
+          <a:p>
+            <a:pPr algn="ctr" indent="0" marL="0">
+              <a:buNone/>
+            </a:pPr>
+            <a:r>
+              <a:rPr lang="en-US" sz="850" dirty="0">
+                <a:solidFill>
+                  <a:srgbClr val="475569"/>
+                </a:solidFill>
+                <a:latin typeface="Calibri" pitchFamily="34" charset="0"/>
+                <a:ea typeface="Calibri" pitchFamily="34" charset="-122"/>
+                <a:cs typeface="Calibri" pitchFamily="34" charset="-120"/>
+              </a:rPr>
+              <a:t>past tense</a:t>
+            </a:r>
+            <a:endParaRPr lang="en-US" sz="850" dirty="0"/>
+          </a:p>
+        </p:txBody>
+      </p:sp>
+      <p:sp>
+        <p:nvSpPr>
+          <p:cNvPr id="25" name="Shape 23"/>
           <p:cNvSpPr/>
           <p:nvPr/>
         </p:nvSpPr>
@@ -22186,7 +22444,7 @@
       </p:sp>
       <p:sp>
         <p:nvSpPr>
-          <p:cNvPr id="23" name="Text 21"/>
+          <p:cNvPr id="26" name="Text 24"/>
           <p:cNvSpPr/>
           <p:nvPr/>
         </p:nvSpPr>
@@ -22225,7 +22483,7 @@
       </p:sp>
       <p:sp>
         <p:nvSpPr>
-          <p:cNvPr id="24" name="Shape 22"/>
+          <p:cNvPr id="27" name="Shape 25"/>
           <p:cNvSpPr/>
           <p:nvPr/>
         </p:nvSpPr>
@@ -22252,7 +22510,7 @@
       </p:sp>
       <p:sp>
         <p:nvSpPr>
-          <p:cNvPr id="25" name="Shape 23"/>
+          <p:cNvPr id="28" name="Shape 26"/>
           <p:cNvSpPr/>
           <p:nvPr/>
         </p:nvSpPr>
@@ -22279,7 +22537,7 @@
       </p:sp>
       <p:sp>
         <p:nvSpPr>
-          <p:cNvPr id="26" name="Text 24"/>
+          <p:cNvPr id="29" name="Text 27"/>
           <p:cNvSpPr/>
           <p:nvPr/>
         </p:nvSpPr>
@@ -22318,7 +22576,7 @@
       </p:sp>
       <p:sp>
         <p:nvSpPr>
-          <p:cNvPr id="27" name="Text 25"/>
+          <p:cNvPr id="30" name="Text 28"/>
           <p:cNvSpPr/>
           <p:nvPr/>
         </p:nvSpPr>
@@ -22357,7 +22615,7 @@
       </p:sp>
       <p:sp>
         <p:nvSpPr>
-          <p:cNvPr id="28" name="Shape 26"/>
+          <p:cNvPr id="31" name="Shape 29"/>
           <p:cNvSpPr/>
           <p:nvPr/>
         </p:nvSpPr>
@@ -22384,7 +22642,7 @@
       </p:sp>
       <p:sp>
         <p:nvSpPr>
-          <p:cNvPr id="29" name="Text 27"/>
+          <p:cNvPr id="32" name="Text 30"/>
           <p:cNvSpPr/>
           <p:nvPr/>
         </p:nvSpPr>
@@ -22423,7 +22681,7 @@
       </p:sp>
       <p:sp>
         <p:nvSpPr>
-          <p:cNvPr id="30" name="Text 28"/>
+          <p:cNvPr id="33" name="Text 31"/>
           <p:cNvSpPr/>
           <p:nvPr/>
         </p:nvSpPr>
@@ -22462,7 +22720,7 @@
       </p:sp>
       <p:sp>
         <p:nvSpPr>
-          <p:cNvPr id="31" name="Shape 29"/>
+          <p:cNvPr id="34" name="Shape 32"/>
           <p:cNvSpPr/>
           <p:nvPr/>
         </p:nvSpPr>
@@ -22489,7 +22747,7 @@
       </p:sp>
       <p:sp>
         <p:nvSpPr>
-          <p:cNvPr id="32" name="Text 30"/>
+          <p:cNvPr id="35" name="Text 33"/>
           <p:cNvSpPr/>
           <p:nvPr/>
         </p:nvSpPr>
@@ -22520,7 +22778,7 @@
                 <a:ea typeface="Trebuchet MS" pitchFamily="34" charset="-122"/>
                 <a:cs typeface="Trebuchet MS" pitchFamily="34" charset="-120"/>
               </a:rPr>
-              <a:t>slept</a:t>
+              <a:t>flowed</a:t>
             </a:r>
             <a:endParaRPr lang="en-US" sz="1400" dirty="0"/>
           </a:p>
@@ -22528,7 +22786,7 @@
       </p:sp>
       <p:sp>
         <p:nvSpPr>
-          <p:cNvPr id="33" name="Shape 31"/>
+          <p:cNvPr id="36" name="Shape 34"/>
           <p:cNvSpPr/>
           <p:nvPr/>
         </p:nvSpPr>
@@ -22555,7 +22813,7 @@
       </p:sp>
       <p:sp>
         <p:nvSpPr>
-          <p:cNvPr id="34" name="Text 32"/>
+          <p:cNvPr id="37" name="Text 35"/>
           <p:cNvSpPr/>
           <p:nvPr/>
         </p:nvSpPr>
@@ -22594,7 +22852,7 @@
       </p:sp>
       <p:sp>
         <p:nvSpPr>
-          <p:cNvPr id="35" name="Shape 33"/>
+          <p:cNvPr id="38" name="Shape 36"/>
           <p:cNvSpPr/>
           <p:nvPr/>
         </p:nvSpPr>
@@ -22621,13 +22879,13 @@
       </p:sp>
       <p:sp>
         <p:nvSpPr>
-          <p:cNvPr id="36" name="Shape 34"/>
-          <p:cNvSpPr/>
-          <p:nvPr/>
-        </p:nvSpPr>
-        <p:spPr>
-          <a:xfrm>
-            <a:off x="2023872" y="4169664"/>
+          <p:cNvPr id="39" name="Shape 37"/>
+          <p:cNvSpPr/>
+          <p:nvPr/>
+        </p:nvSpPr>
+        <p:spPr>
+          <a:xfrm>
+            <a:off x="2124837" y="4169664"/>
             <a:ext cx="685800" cy="475488"/>
           </a:xfrm>
           <a:prstGeom prst="rect">
@@ -22648,13 +22906,13 @@
       </p:sp>
       <p:sp>
         <p:nvSpPr>
-          <p:cNvPr id="37" name="Text 35"/>
-          <p:cNvSpPr/>
-          <p:nvPr/>
-        </p:nvSpPr>
-        <p:spPr>
-          <a:xfrm>
-            <a:off x="2023872" y="4169664"/>
+          <p:cNvPr id="40" name="Text 38"/>
+          <p:cNvSpPr/>
+          <p:nvPr/>
+        </p:nvSpPr>
+        <p:spPr>
+          <a:xfrm>
+            <a:off x="2124837" y="4169664"/>
             <a:ext cx="685800" cy="475488"/>
           </a:xfrm>
           <a:prstGeom prst="rect">
@@ -22687,13 +22945,13 @@
       </p:sp>
       <p:sp>
         <p:nvSpPr>
-          <p:cNvPr id="38" name="Shape 36"/>
-          <p:cNvSpPr/>
-          <p:nvPr/>
-        </p:nvSpPr>
-        <p:spPr>
-          <a:xfrm>
-            <a:off x="2831592" y="4169664"/>
+          <p:cNvPr id="41" name="Shape 39"/>
+          <p:cNvSpPr/>
+          <p:nvPr/>
+        </p:nvSpPr>
+        <p:spPr>
+          <a:xfrm>
+            <a:off x="3033522" y="4169664"/>
             <a:ext cx="685800" cy="475488"/>
           </a:xfrm>
           <a:prstGeom prst="rect">
@@ -22714,13 +22972,13 @@
       </p:sp>
       <p:sp>
         <p:nvSpPr>
-          <p:cNvPr id="39" name="Text 37"/>
-          <p:cNvSpPr/>
-          <p:nvPr/>
-        </p:nvSpPr>
-        <p:spPr>
-          <a:xfrm>
-            <a:off x="2831592" y="4169664"/>
+          <p:cNvPr id="42" name="Text 40"/>
+          <p:cNvSpPr/>
+          <p:nvPr/>
+        </p:nvSpPr>
+        <p:spPr>
+          <a:xfrm>
+            <a:off x="3033522" y="4169664"/>
             <a:ext cx="685800" cy="475488"/>
           </a:xfrm>
           <a:prstGeom prst="rect">
@@ -22753,13 +23011,13 @@
       </p:sp>
       <p:sp>
         <p:nvSpPr>
-          <p:cNvPr id="40" name="Shape 38"/>
-          <p:cNvSpPr/>
-          <p:nvPr/>
-        </p:nvSpPr>
-        <p:spPr>
-          <a:xfrm>
-            <a:off x="3639312" y="4169664"/>
+          <p:cNvPr id="43" name="Shape 41"/>
+          <p:cNvSpPr/>
+          <p:nvPr/>
+        </p:nvSpPr>
+        <p:spPr>
+          <a:xfrm>
+            <a:off x="3942207" y="4169664"/>
             <a:ext cx="685800" cy="475488"/>
           </a:xfrm>
           <a:prstGeom prst="rect">
@@ -22780,13 +23038,13 @@
       </p:sp>
       <p:sp>
         <p:nvSpPr>
-          <p:cNvPr id="41" name="Text 39"/>
-          <p:cNvSpPr/>
-          <p:nvPr/>
-        </p:nvSpPr>
-        <p:spPr>
-          <a:xfrm>
-            <a:off x="3639312" y="4169664"/>
+          <p:cNvPr id="44" name="Text 42"/>
+          <p:cNvSpPr/>
+          <p:nvPr/>
+        </p:nvSpPr>
+        <p:spPr>
+          <a:xfrm>
+            <a:off x="3942207" y="4169664"/>
             <a:ext cx="685800" cy="475488"/>
           </a:xfrm>
           <a:prstGeom prst="rect">
@@ -22819,13 +23077,13 @@
       </p:sp>
       <p:sp>
         <p:nvSpPr>
-          <p:cNvPr id="42" name="Shape 40"/>
-          <p:cNvSpPr/>
-          <p:nvPr/>
-        </p:nvSpPr>
-        <p:spPr>
-          <a:xfrm>
-            <a:off x="4447032" y="4169664"/>
+          <p:cNvPr id="45" name="Shape 43"/>
+          <p:cNvSpPr/>
+          <p:nvPr/>
+        </p:nvSpPr>
+        <p:spPr>
+          <a:xfrm>
+            <a:off x="4850892" y="4169664"/>
             <a:ext cx="685800" cy="475488"/>
           </a:xfrm>
           <a:prstGeom prst="rect">
@@ -22846,13 +23104,13 @@
       </p:sp>
       <p:sp>
         <p:nvSpPr>
-          <p:cNvPr id="43" name="Text 41"/>
-          <p:cNvSpPr/>
-          <p:nvPr/>
-        </p:nvSpPr>
-        <p:spPr>
-          <a:xfrm>
-            <a:off x="4447032" y="4169664"/>
+          <p:cNvPr id="46" name="Text 44"/>
+          <p:cNvSpPr/>
+          <p:nvPr/>
+        </p:nvSpPr>
+        <p:spPr>
+          <a:xfrm>
+            <a:off x="4850892" y="4169664"/>
             <a:ext cx="685800" cy="475488"/>
           </a:xfrm>
           <a:prstGeom prst="rect">
@@ -22877,7 +23135,7 @@
                 <a:ea typeface="Trebuchet MS" pitchFamily="34" charset="-122"/>
                 <a:cs typeface="Trebuchet MS" pitchFamily="34" charset="-120"/>
               </a:rPr>
-              <a:t>s</a:t>
+              <a:t>f</a:t>
             </a:r>
             <a:endParaRPr lang="en-US" sz="900" dirty="0"/>
           </a:p>
@@ -22885,13 +23143,13 @@
       </p:sp>
       <p:sp>
         <p:nvSpPr>
-          <p:cNvPr id="44" name="Shape 42"/>
-          <p:cNvSpPr/>
-          <p:nvPr/>
-        </p:nvSpPr>
-        <p:spPr>
-          <a:xfrm>
-            <a:off x="5254752" y="4169664"/>
+          <p:cNvPr id="47" name="Shape 45"/>
+          <p:cNvSpPr/>
+          <p:nvPr/>
+        </p:nvSpPr>
+        <p:spPr>
+          <a:xfrm>
+            <a:off x="5759577" y="4169664"/>
             <a:ext cx="685800" cy="475488"/>
           </a:xfrm>
           <a:prstGeom prst="rect">
@@ -22912,13 +23170,13 @@
       </p:sp>
       <p:sp>
         <p:nvSpPr>
-          <p:cNvPr id="45" name="Text 43"/>
-          <p:cNvSpPr/>
-          <p:nvPr/>
-        </p:nvSpPr>
-        <p:spPr>
-          <a:xfrm>
-            <a:off x="5254752" y="4169664"/>
+          <p:cNvPr id="48" name="Text 46"/>
+          <p:cNvSpPr/>
+          <p:nvPr/>
+        </p:nvSpPr>
+        <p:spPr>
+          <a:xfrm>
+            <a:off x="5759577" y="4169664"/>
             <a:ext cx="685800" cy="475488"/>
           </a:xfrm>
           <a:prstGeom prst="rect">
@@ -22951,13 +23209,13 @@
       </p:sp>
       <p:sp>
         <p:nvSpPr>
-          <p:cNvPr id="46" name="Shape 44"/>
-          <p:cNvSpPr/>
-          <p:nvPr/>
-        </p:nvSpPr>
-        <p:spPr>
-          <a:xfrm>
-            <a:off x="6062472" y="4169664"/>
+          <p:cNvPr id="49" name="Shape 47"/>
+          <p:cNvSpPr/>
+          <p:nvPr/>
+        </p:nvSpPr>
+        <p:spPr>
+          <a:xfrm>
+            <a:off x="6668262" y="4169664"/>
             <a:ext cx="685800" cy="475488"/>
           </a:xfrm>
           <a:prstGeom prst="rect">
@@ -22978,13 +23236,13 @@
       </p:sp>
       <p:sp>
         <p:nvSpPr>
-          <p:cNvPr id="47" name="Text 45"/>
-          <p:cNvSpPr/>
-          <p:nvPr/>
-        </p:nvSpPr>
-        <p:spPr>
-          <a:xfrm>
-            <a:off x="6062472" y="4169664"/>
+          <p:cNvPr id="50" name="Text 48"/>
+          <p:cNvSpPr/>
+          <p:nvPr/>
+        </p:nvSpPr>
+        <p:spPr>
+          <a:xfrm>
+            <a:off x="6668262" y="4169664"/>
             <a:ext cx="685800" cy="475488"/>
           </a:xfrm>
           <a:prstGeom prst="rect">
@@ -23009,7 +23267,7 @@
                 <a:ea typeface="Trebuchet MS" pitchFamily="34" charset="-122"/>
                 <a:cs typeface="Trebuchet MS" pitchFamily="34" charset="-120"/>
               </a:rPr>
-              <a:t>e</a:t>
+              <a:t>ow</a:t>
             </a:r>
             <a:endParaRPr lang="en-US" sz="900" dirty="0"/>
           </a:p>
@@ -23017,13 +23275,13 @@
       </p:sp>
       <p:sp>
         <p:nvSpPr>
-          <p:cNvPr id="48" name="Shape 46"/>
-          <p:cNvSpPr/>
-          <p:nvPr/>
-        </p:nvSpPr>
-        <p:spPr>
-          <a:xfrm>
-            <a:off x="6870192" y="4169664"/>
+          <p:cNvPr id="51" name="Shape 49"/>
+          <p:cNvSpPr/>
+          <p:nvPr/>
+        </p:nvSpPr>
+        <p:spPr>
+          <a:xfrm>
+            <a:off x="7576947" y="4169664"/>
             <a:ext cx="685800" cy="475488"/>
           </a:xfrm>
           <a:prstGeom prst="rect">
@@ -23044,13 +23302,13 @@
       </p:sp>
       <p:sp>
         <p:nvSpPr>
-          <p:cNvPr id="49" name="Text 47"/>
-          <p:cNvSpPr/>
-          <p:nvPr/>
-        </p:nvSpPr>
-        <p:spPr>
-          <a:xfrm>
-            <a:off x="6870192" y="4169664"/>
+          <p:cNvPr id="52" name="Text 50"/>
+          <p:cNvSpPr/>
+          <p:nvPr/>
+        </p:nvSpPr>
+        <p:spPr>
+          <a:xfrm>
+            <a:off x="7576947" y="4169664"/>
             <a:ext cx="685800" cy="475488"/>
           </a:xfrm>
           <a:prstGeom prst="rect">
@@ -23075,73 +23333,7 @@
                 <a:ea typeface="Trebuchet MS" pitchFamily="34" charset="-122"/>
                 <a:cs typeface="Trebuchet MS" pitchFamily="34" charset="-120"/>
               </a:rPr>
-              <a:t>p</a:t>
-            </a:r>
-            <a:endParaRPr lang="en-US" sz="900" dirty="0"/>
-          </a:p>
-        </p:txBody>
-      </p:sp>
-      <p:sp>
-        <p:nvSpPr>
-          <p:cNvPr id="50" name="Shape 48"/>
-          <p:cNvSpPr/>
-          <p:nvPr/>
-        </p:nvSpPr>
-        <p:spPr>
-          <a:xfrm>
-            <a:off x="7677912" y="4169664"/>
-            <a:ext cx="685800" cy="475488"/>
-          </a:xfrm>
-          <a:prstGeom prst="rect">
-            <a:avLst>
-              <a:gd name="adj" fmla="val 7692"/>
-            </a:avLst>
-          </a:prstGeom>
-          <a:solidFill>
-            <a:srgbClr val="FFFFFF"/>
-          </a:solidFill>
-          <a:ln w="12700">
-            <a:solidFill>
-              <a:srgbClr val="DB2777"/>
-            </a:solidFill>
-            <a:prstDash val="solid"/>
-          </a:ln>
-        </p:spPr>
-      </p:sp>
-      <p:sp>
-        <p:nvSpPr>
-          <p:cNvPr id="51" name="Text 49"/>
-          <p:cNvSpPr/>
-          <p:nvPr/>
-        </p:nvSpPr>
-        <p:spPr>
-          <a:xfrm>
-            <a:off x="7677912" y="4169664"/>
-            <a:ext cx="685800" cy="475488"/>
-          </a:xfrm>
-          <a:prstGeom prst="rect">
-            <a:avLst/>
-          </a:prstGeom>
-          <a:noFill/>
-          <a:ln/>
-        </p:spPr>
-        <p:txBody>
-          <a:bodyPr wrap="square" lIns="0" tIns="0" rIns="0" bIns="0" rtlCol="0" anchor="ctr"/>
-          <a:lstStyle/>
-          <a:p>
-            <a:pPr algn="ctr" indent="0" marL="0">
-              <a:buNone/>
-            </a:pPr>
-            <a:r>
-              <a:rPr lang="en-US" sz="900" b="1" dirty="0">
-                <a:solidFill>
-                  <a:srgbClr val="9D174D"/>
-                </a:solidFill>
-                <a:latin typeface="Trebuchet MS" pitchFamily="34" charset="0"/>
-                <a:ea typeface="Trebuchet MS" pitchFamily="34" charset="-122"/>
-                <a:cs typeface="Trebuchet MS" pitchFamily="34" charset="-120"/>
-              </a:rPr>
-              <a:t>t</a:t>
+              <a:t>ed</a:t>
             </a:r>
             <a:endParaRPr lang="en-US" sz="900" dirty="0"/>
           </a:p>
@@ -23572,7 +23764,7 @@
                 <a:ea typeface="Trebuchet MS" pitchFamily="34" charset="-122"/>
                 <a:cs typeface="Trebuchet MS" pitchFamily="34" charset="-120"/>
               </a:rPr>
-              <a:t>overcame</a:t>
+              <a:t>overcome</a:t>
             </a:r>
             <a:endParaRPr lang="en-US" sz="2800" dirty="0"/>
           </a:p>
@@ -24399,7 +24591,7 @@
                 <a:ea typeface="Trebuchet MS" pitchFamily="34" charset="-122"/>
                 <a:cs typeface="Trebuchet MS" pitchFamily="34" charset="-120"/>
               </a:rPr>
-              <a:t>overcame</a:t>
+              <a:t>overcome</a:t>
             </a:r>
             <a:endParaRPr lang="en-US" sz="2800" dirty="0"/>
           </a:p>
@@ -24577,7 +24769,7 @@
                 <a:ea typeface="Calibri" pitchFamily="34" charset="-122"/>
                 <a:cs typeface="Calibri" pitchFamily="34" charset="-120"/>
               </a:rPr>
-              <a:t>above, beyond</a:t>
+              <a:t>above / beyond</a:t>
             </a:r>
             <a:endParaRPr lang="en-US" sz="850" dirty="0"/>
           </a:p>
@@ -24650,7 +24842,7 @@
                 <a:ea typeface="Trebuchet MS" pitchFamily="34" charset="-122"/>
                 <a:cs typeface="Trebuchet MS" pitchFamily="34" charset="-120"/>
               </a:rPr>
-              <a:t>came</a:t>
+              <a:t>come</a:t>
             </a:r>
             <a:endParaRPr lang="en-US" sz="1300" dirty="0"/>
           </a:p>
@@ -24689,7 +24881,7 @@
                 <a:ea typeface="Calibri" pitchFamily="34" charset="-122"/>
                 <a:cs typeface="Calibri" pitchFamily="34" charset="-120"/>
               </a:rPr>
-              <a:t>past tense of come</a:t>
+              <a:t>to get through or past</a:t>
             </a:r>
             <a:endParaRPr lang="en-US" sz="850" dirty="0"/>
           </a:p>
@@ -26103,7 +26295,7 @@
                 <a:ea typeface="Trebuchet MS" pitchFamily="34" charset="-122"/>
                 <a:cs typeface="Trebuchet MS" pitchFamily="34" charset="-120"/>
               </a:rPr>
-              <a:t>overcame</a:t>
+              <a:t>overcome</a:t>
             </a:r>
             <a:endParaRPr lang="en-US" sz="2800" dirty="0"/>
           </a:p>
@@ -26281,7 +26473,7 @@
                 <a:ea typeface="Calibri" pitchFamily="34" charset="-122"/>
                 <a:cs typeface="Calibri" pitchFamily="34" charset="-120"/>
               </a:rPr>
-              <a:t>above, beyond</a:t>
+              <a:t>above / beyond</a:t>
             </a:r>
             <a:endParaRPr lang="en-US" sz="850" dirty="0"/>
           </a:p>
@@ -26354,7 +26546,7 @@
                 <a:ea typeface="Trebuchet MS" pitchFamily="34" charset="-122"/>
                 <a:cs typeface="Trebuchet MS" pitchFamily="34" charset="-120"/>
               </a:rPr>
-              <a:t>came</a:t>
+              <a:t>come</a:t>
             </a:r>
             <a:endParaRPr lang="en-US" sz="1300" dirty="0"/>
           </a:p>
@@ -26393,7 +26585,7 @@
                 <a:ea typeface="Calibri" pitchFamily="34" charset="-122"/>
                 <a:cs typeface="Calibri" pitchFamily="34" charset="-120"/>
               </a:rPr>
-              <a:t>past tense of come</a:t>
+              <a:t>to get through or past</a:t>
             </a:r>
             <a:endParaRPr lang="en-US" sz="850" dirty="0"/>
           </a:p>
@@ -26762,7 +26954,7 @@
                 <a:ea typeface="Trebuchet MS" pitchFamily="34" charset="-122"/>
                 <a:cs typeface="Trebuchet MS" pitchFamily="34" charset="-120"/>
               </a:rPr>
-              <a:t>came</a:t>
+              <a:t>come</a:t>
             </a:r>
             <a:endParaRPr lang="en-US" sz="1400" dirty="0"/>
           </a:p>
@@ -27325,7 +27517,7 @@
                 <a:ea typeface="Trebuchet MS" pitchFamily="34" charset="-122"/>
                 <a:cs typeface="Trebuchet MS" pitchFamily="34" charset="-120"/>
               </a:rPr>
-              <a:t>overcame</a:t>
+              <a:t>overcome</a:t>
             </a:r>
             <a:endParaRPr lang="en-US" sz="2800" dirty="0"/>
           </a:p>
@@ -27503,7 +27695,7 @@
                 <a:ea typeface="Calibri" pitchFamily="34" charset="-122"/>
                 <a:cs typeface="Calibri" pitchFamily="34" charset="-120"/>
               </a:rPr>
-              <a:t>above, beyond</a:t>
+              <a:t>above / beyond</a:t>
             </a:r>
             <a:endParaRPr lang="en-US" sz="850" dirty="0"/>
           </a:p>
@@ -27576,7 +27768,7 @@
                 <a:ea typeface="Trebuchet MS" pitchFamily="34" charset="-122"/>
                 <a:cs typeface="Trebuchet MS" pitchFamily="34" charset="-120"/>
               </a:rPr>
-              <a:t>came</a:t>
+              <a:t>come</a:t>
             </a:r>
             <a:endParaRPr lang="en-US" sz="1300" dirty="0"/>
           </a:p>
@@ -27615,7 +27807,7 @@
                 <a:ea typeface="Calibri" pitchFamily="34" charset="-122"/>
                 <a:cs typeface="Calibri" pitchFamily="34" charset="-120"/>
               </a:rPr>
-              <a:t>past tense of come</a:t>
+              <a:t>to get through or past</a:t>
             </a:r>
             <a:endParaRPr lang="en-US" sz="850" dirty="0"/>
           </a:p>
@@ -27984,7 +28176,7 @@
                 <a:ea typeface="Trebuchet MS" pitchFamily="34" charset="-122"/>
                 <a:cs typeface="Trebuchet MS" pitchFamily="34" charset="-120"/>
               </a:rPr>
-              <a:t>came</a:t>
+              <a:t>come</a:t>
             </a:r>
             <a:endParaRPr lang="en-US" sz="1400" dirty="0"/>
           </a:p>
@@ -28407,7 +28599,7 @@
                 <a:ea typeface="Trebuchet MS" pitchFamily="34" charset="-122"/>
                 <a:cs typeface="Trebuchet MS" pitchFamily="34" charset="-120"/>
               </a:rPr>
-              <a:t>a</a:t>
+              <a:t>o</a:t>
             </a:r>
             <a:endParaRPr lang="en-US" sz="900" dirty="0"/>
           </a:p>
@@ -28904,7 +29096,7 @@
                 <a:ea typeface="Trebuchet MS" pitchFamily="34" charset="-122"/>
                 <a:cs typeface="Trebuchet MS" pitchFamily="34" charset="-120"/>
               </a:rPr>
-              <a:t>overflowing</a:t>
+              <a:t>overjoyed</a:t>
             </a:r>
             <a:endParaRPr lang="en-US" sz="2800" dirty="0"/>
           </a:p>
@@ -29731,7 +29923,7 @@
                 <a:ea typeface="Trebuchet MS" pitchFamily="34" charset="-122"/>
                 <a:cs typeface="Trebuchet MS" pitchFamily="34" charset="-120"/>
               </a:rPr>
-              <a:t>overflowing</a:t>
+              <a:t>overjoyed</a:t>
             </a:r>
             <a:endParaRPr lang="en-US" sz="2800" dirty="0"/>
           </a:p>
@@ -29909,7 +30101,7 @@
                 <a:ea typeface="Calibri" pitchFamily="34" charset="-122"/>
                 <a:cs typeface="Calibri" pitchFamily="34" charset="-120"/>
               </a:rPr>
-              <a:t>beyond, too much</a:t>
+              <a:t>too much / beyond</a:t>
             </a:r>
             <a:endParaRPr lang="en-US" sz="850" dirty="0"/>
           </a:p>
@@ -29982,7 +30174,7 @@
                 <a:ea typeface="Trebuchet MS" pitchFamily="34" charset="-122"/>
                 <a:cs typeface="Trebuchet MS" pitchFamily="34" charset="-120"/>
               </a:rPr>
-              <a:t>flow</a:t>
+              <a:t>joy</a:t>
             </a:r>
             <a:endParaRPr lang="en-US" sz="1300" dirty="0"/>
           </a:p>
@@ -30021,7 +30213,7 @@
                 <a:ea typeface="Calibri" pitchFamily="34" charset="-122"/>
                 <a:cs typeface="Calibri" pitchFamily="34" charset="-120"/>
               </a:rPr>
-              <a:t>to move like water</a:t>
+              <a:t>great happiness</a:t>
             </a:r>
             <a:endParaRPr lang="en-US" sz="850" dirty="0"/>
           </a:p>
@@ -30094,7 +30286,7 @@
                 <a:ea typeface="Trebuchet MS" pitchFamily="34" charset="-122"/>
                 <a:cs typeface="Trebuchet MS" pitchFamily="34" charset="-120"/>
               </a:rPr>
-              <a:t>ing</a:t>
+              <a:t>ed</a:t>
             </a:r>
             <a:endParaRPr lang="en-US" sz="1300" dirty="0"/>
           </a:p>
@@ -30133,7 +30325,7 @@
                 <a:ea typeface="Calibri" pitchFamily="34" charset="-122"/>
                 <a:cs typeface="Calibri" pitchFamily="34" charset="-120"/>
               </a:rPr>
-              <a:t>happening now</a:t>
+              <a:t>having a quality</a:t>
             </a:r>
             <a:endParaRPr lang="en-US" sz="850" dirty="0"/>
           </a:p>
@@ -30828,7 +31020,7 @@
                 <a:ea typeface="Trebuchet MS" pitchFamily="34" charset="-122"/>
                 <a:cs typeface="Trebuchet MS" pitchFamily="34" charset="-120"/>
               </a:rPr>
-              <a:t>overflowing</a:t>
+              <a:t>overjoyed</a:t>
             </a:r>
             <a:endParaRPr lang="en-US" sz="2800" dirty="0"/>
           </a:p>
@@ -31006,7 +31198,7 @@
                 <a:ea typeface="Calibri" pitchFamily="34" charset="-122"/>
                 <a:cs typeface="Calibri" pitchFamily="34" charset="-120"/>
               </a:rPr>
-              <a:t>beyond, too much</a:t>
+              <a:t>too much / beyond</a:t>
             </a:r>
             <a:endParaRPr lang="en-US" sz="850" dirty="0"/>
           </a:p>
@@ -31079,7 +31271,7 @@
                 <a:ea typeface="Trebuchet MS" pitchFamily="34" charset="-122"/>
                 <a:cs typeface="Trebuchet MS" pitchFamily="34" charset="-120"/>
               </a:rPr>
-              <a:t>flow</a:t>
+              <a:t>joy</a:t>
             </a:r>
             <a:endParaRPr lang="en-US" sz="1300" dirty="0"/>
           </a:p>
@@ -31118,7 +31310,7 @@
                 <a:ea typeface="Calibri" pitchFamily="34" charset="-122"/>
                 <a:cs typeface="Calibri" pitchFamily="34" charset="-120"/>
               </a:rPr>
-              <a:t>to move like water</a:t>
+              <a:t>great happiness</a:t>
             </a:r>
             <a:endParaRPr lang="en-US" sz="850" dirty="0"/>
           </a:p>
@@ -31191,7 +31383,7 @@
                 <a:ea typeface="Trebuchet MS" pitchFamily="34" charset="-122"/>
                 <a:cs typeface="Trebuchet MS" pitchFamily="34" charset="-120"/>
               </a:rPr>
-              <a:t>ing</a:t>
+              <a:t>ed</a:t>
             </a:r>
             <a:endParaRPr lang="en-US" sz="1300" dirty="0"/>
           </a:p>
@@ -31230,7 +31422,7 @@
                 <a:ea typeface="Calibri" pitchFamily="34" charset="-122"/>
                 <a:cs typeface="Calibri" pitchFamily="34" charset="-120"/>
               </a:rPr>
-              <a:t>happening now</a:t>
+              <a:t>having a quality</a:t>
             </a:r>
             <a:endParaRPr lang="en-US" sz="850" dirty="0"/>
           </a:p>
@@ -31337,8 +31529,8 @@
         </p:nvSpPr>
         <p:spPr>
           <a:xfrm>
-            <a:off x="1975104" y="3364992"/>
-            <a:ext cx="1554480" cy="475488"/>
+            <a:off x="2313432" y="3364992"/>
+            <a:ext cx="1645920" cy="475488"/>
           </a:xfrm>
           <a:prstGeom prst="rect">
             <a:avLst>
@@ -31364,8 +31556,8 @@
         </p:nvSpPr>
         <p:spPr>
           <a:xfrm>
-            <a:off x="1975104" y="3364992"/>
-            <a:ext cx="1554480" cy="475488"/>
+            <a:off x="2313432" y="3364992"/>
+            <a:ext cx="1645920" cy="475488"/>
           </a:xfrm>
           <a:prstGeom prst="rect">
             <a:avLst/>
@@ -31403,8 +31595,8 @@
         </p:nvSpPr>
         <p:spPr>
           <a:xfrm>
-            <a:off x="3529584" y="3364992"/>
-            <a:ext cx="73152" cy="475488"/>
+            <a:off x="3959352" y="3364992"/>
+            <a:ext cx="411480" cy="475488"/>
           </a:xfrm>
           <a:prstGeom prst="rect">
             <a:avLst/>
@@ -31442,8 +31634,8 @@
         </p:nvSpPr>
         <p:spPr>
           <a:xfrm>
-            <a:off x="3602736" y="3364992"/>
-            <a:ext cx="1554480" cy="475488"/>
+            <a:off x="4370832" y="3364992"/>
+            <a:ext cx="1645920" cy="475488"/>
           </a:xfrm>
           <a:prstGeom prst="rect">
             <a:avLst>
@@ -31469,8 +31661,8 @@
         </p:nvSpPr>
         <p:spPr>
           <a:xfrm>
-            <a:off x="3602736" y="3364992"/>
-            <a:ext cx="1554480" cy="475488"/>
+            <a:off x="4370832" y="3364992"/>
+            <a:ext cx="1645920" cy="475488"/>
           </a:xfrm>
           <a:prstGeom prst="rect">
             <a:avLst/>
@@ -31508,8 +31700,8 @@
         </p:nvSpPr>
         <p:spPr>
           <a:xfrm>
-            <a:off x="5157216" y="3364992"/>
-            <a:ext cx="73152" cy="475488"/>
+            <a:off x="6016752" y="3364992"/>
+            <a:ext cx="411480" cy="475488"/>
           </a:xfrm>
           <a:prstGeom prst="rect">
             <a:avLst/>
@@ -31547,8 +31739,8 @@
         </p:nvSpPr>
         <p:spPr>
           <a:xfrm>
-            <a:off x="5230368" y="3364992"/>
-            <a:ext cx="1554480" cy="475488"/>
+            <a:off x="6428232" y="3364992"/>
+            <a:ext cx="1645920" cy="475488"/>
           </a:xfrm>
           <a:prstGeom prst="rect">
             <a:avLst>
@@ -31574,8 +31766,8 @@
         </p:nvSpPr>
         <p:spPr>
           <a:xfrm>
-            <a:off x="5230368" y="3364992"/>
-            <a:ext cx="1554480" cy="475488"/>
+            <a:off x="6428232" y="3364992"/>
+            <a:ext cx="1645920" cy="475488"/>
           </a:xfrm>
           <a:prstGeom prst="rect">
             <a:avLst/>
@@ -31599,7 +31791,7 @@
                 <a:ea typeface="Trebuchet MS" pitchFamily="34" charset="-122"/>
                 <a:cs typeface="Trebuchet MS" pitchFamily="34" charset="-120"/>
               </a:rPr>
-              <a:t>flow</a:t>
+              <a:t>joyed</a:t>
             </a:r>
             <a:endParaRPr lang="en-US" sz="1400" dirty="0"/>
           </a:p>
@@ -31607,119 +31799,80 @@
       </p:sp>
       <p:sp>
         <p:nvSpPr>
-          <p:cNvPr id="36" name="Text 34"/>
-          <p:cNvSpPr/>
-          <p:nvPr/>
-        </p:nvSpPr>
-        <p:spPr>
-          <a:xfrm>
-            <a:off x="6784848" y="3364992"/>
-            <a:ext cx="73152" cy="475488"/>
-          </a:xfrm>
-          <a:prstGeom prst="rect">
-            <a:avLst/>
-          </a:prstGeom>
-          <a:noFill/>
-          <a:ln/>
-        </p:spPr>
-        <p:txBody>
-          <a:bodyPr wrap="square" lIns="0" tIns="0" rIns="0" bIns="0" rtlCol="0" anchor="ctr"/>
-          <a:lstStyle/>
-          <a:p>
-            <a:pPr algn="ctr" indent="0" marL="0">
-              <a:buNone/>
-            </a:pPr>
-            <a:r>
-              <a:rPr lang="en-US" sz="1600" b="1" dirty="0">
-                <a:solidFill>
-                  <a:srgbClr val="0D9488"/>
+          <p:cNvPr id="36" name="Shape 34"/>
+          <p:cNvSpPr/>
+          <p:nvPr/>
+        </p:nvSpPr>
+        <p:spPr>
+          <a:xfrm>
+            <a:off x="365760" y="4096512"/>
+            <a:ext cx="1371600" cy="804672"/>
+          </a:xfrm>
+          <a:prstGeom prst="rect">
+            <a:avLst>
+              <a:gd name="adj" fmla="val 6818"/>
+            </a:avLst>
+          </a:prstGeom>
+          <a:solidFill>
+            <a:srgbClr val="E2E8F0"/>
+          </a:solidFill>
+          <a:ln w="12700">
+            <a:solidFill>
+              <a:srgbClr val="E2E8F0"/>
+            </a:solidFill>
+            <a:prstDash val="solid"/>
+          </a:ln>
+        </p:spPr>
+      </p:sp>
+      <p:sp>
+        <p:nvSpPr>
+          <p:cNvPr id="37" name="Text 35"/>
+          <p:cNvSpPr/>
+          <p:nvPr/>
+        </p:nvSpPr>
+        <p:spPr>
+          <a:xfrm>
+            <a:off x="365760" y="4096512"/>
+            <a:ext cx="1371600" cy="804672"/>
+          </a:xfrm>
+          <a:prstGeom prst="rect">
+            <a:avLst/>
+          </a:prstGeom>
+          <a:noFill/>
+          <a:ln/>
+        </p:spPr>
+        <p:txBody>
+          <a:bodyPr wrap="square" lIns="0" tIns="0" rIns="0" bIns="0" rtlCol="0" anchor="ctr"/>
+          <a:lstStyle/>
+          <a:p>
+            <a:pPr algn="ctr" indent="0" marL="0">
+              <a:buNone/>
+            </a:pPr>
+            <a:r>
+              <a:rPr lang="en-US" sz="1100" b="1" dirty="0">
+                <a:solidFill>
+                  <a:srgbClr val="475569"/>
                 </a:solidFill>
                 <a:latin typeface="Trebuchet MS" pitchFamily="34" charset="0"/>
                 <a:ea typeface="Trebuchet MS" pitchFamily="34" charset="-122"/>
                 <a:cs typeface="Trebuchet MS" pitchFamily="34" charset="-120"/>
               </a:rPr>
-              <a:t>·</a:t>
-            </a:r>
-            <a:endParaRPr lang="en-US" sz="1600" dirty="0"/>
-          </a:p>
-        </p:txBody>
-      </p:sp>
-      <p:sp>
-        <p:nvSpPr>
-          <p:cNvPr id="37" name="Shape 35"/>
-          <p:cNvSpPr/>
-          <p:nvPr/>
-        </p:nvSpPr>
-        <p:spPr>
-          <a:xfrm>
-            <a:off x="6858000" y="3364992"/>
-            <a:ext cx="1554480" cy="475488"/>
-          </a:xfrm>
-          <a:prstGeom prst="rect">
-            <a:avLst>
-              <a:gd name="adj" fmla="val 9615"/>
-            </a:avLst>
-          </a:prstGeom>
-          <a:solidFill>
-            <a:srgbClr val="FFFFFF"/>
-          </a:solidFill>
-          <a:ln w="12700">
-            <a:solidFill>
-              <a:srgbClr val="0D9488"/>
-            </a:solidFill>
-            <a:prstDash val="solid"/>
-          </a:ln>
-        </p:spPr>
-      </p:sp>
-      <p:sp>
-        <p:nvSpPr>
-          <p:cNvPr id="38" name="Text 36"/>
-          <p:cNvSpPr/>
-          <p:nvPr/>
-        </p:nvSpPr>
-        <p:spPr>
-          <a:xfrm>
-            <a:off x="6858000" y="3364992"/>
-            <a:ext cx="1554480" cy="475488"/>
-          </a:xfrm>
-          <a:prstGeom prst="rect">
-            <a:avLst/>
-          </a:prstGeom>
-          <a:noFill/>
-          <a:ln/>
-        </p:spPr>
-        <p:txBody>
-          <a:bodyPr wrap="square" lIns="0" tIns="0" rIns="0" bIns="0" rtlCol="0" anchor="ctr"/>
-          <a:lstStyle/>
-          <a:p>
-            <a:pPr algn="ctr" indent="0" marL="0">
-              <a:buNone/>
-            </a:pPr>
-            <a:r>
-              <a:rPr lang="en-US" sz="1400" b="1" dirty="0">
-                <a:solidFill>
-                  <a:srgbClr val="0D9488"/>
-                </a:solidFill>
-                <a:latin typeface="Trebuchet MS" pitchFamily="34" charset="0"/>
-                <a:ea typeface="Trebuchet MS" pitchFamily="34" charset="-122"/>
-                <a:cs typeface="Trebuchet MS" pitchFamily="34" charset="-120"/>
-              </a:rPr>
-              <a:t>ing</a:t>
-            </a:r>
-            <a:endParaRPr lang="en-US" sz="1400" dirty="0"/>
-          </a:p>
-        </p:txBody>
-      </p:sp>
-      <p:sp>
-        <p:nvSpPr>
-          <p:cNvPr id="39" name="Shape 37"/>
-          <p:cNvSpPr/>
-          <p:nvPr/>
-        </p:nvSpPr>
-        <p:spPr>
-          <a:xfrm>
-            <a:off x="365760" y="4096512"/>
-            <a:ext cx="1371600" cy="804672"/>
+              <a:t>Phonemes</a:t>
+            </a:r>
+            <a:endParaRPr lang="en-US" sz="1100" dirty="0"/>
+          </a:p>
+        </p:txBody>
+      </p:sp>
+      <p:sp>
+        <p:nvSpPr>
+          <p:cNvPr id="38" name="Shape 36"/>
+          <p:cNvSpPr/>
+          <p:nvPr/>
+        </p:nvSpPr>
+        <p:spPr>
+          <a:xfrm>
+            <a:off x="1874520" y="4096512"/>
+            <a:ext cx="6903720" cy="804672"/>
           </a:xfrm>
           <a:prstGeom prst="rect">
             <a:avLst>
@@ -31727,85 +31880,19 @@
             </a:avLst>
           </a:prstGeom>
           <a:solidFill>
-            <a:srgbClr val="E2E8F0"/>
+            <a:srgbClr val="F8FAFC"/>
           </a:solidFill>
           <a:ln w="12700">
             <a:solidFill>
               <a:srgbClr val="E2E8F0"/>
             </a:solidFill>
-            <a:prstDash val="solid"/>
-          </a:ln>
-        </p:spPr>
-      </p:sp>
-      <p:sp>
-        <p:nvSpPr>
-          <p:cNvPr id="40" name="Text 38"/>
-          <p:cNvSpPr/>
-          <p:nvPr/>
-        </p:nvSpPr>
-        <p:spPr>
-          <a:xfrm>
-            <a:off x="365760" y="4096512"/>
-            <a:ext cx="1371600" cy="804672"/>
-          </a:xfrm>
-          <a:prstGeom prst="rect">
-            <a:avLst/>
-          </a:prstGeom>
-          <a:noFill/>
-          <a:ln/>
-        </p:spPr>
-        <p:txBody>
-          <a:bodyPr wrap="square" lIns="0" tIns="0" rIns="0" bIns="0" rtlCol="0" anchor="ctr"/>
-          <a:lstStyle/>
-          <a:p>
-            <a:pPr algn="ctr" indent="0" marL="0">
-              <a:buNone/>
-            </a:pPr>
-            <a:r>
-              <a:rPr lang="en-US" sz="1100" b="1" dirty="0">
-                <a:solidFill>
-                  <a:srgbClr val="475569"/>
-                </a:solidFill>
-                <a:latin typeface="Trebuchet MS" pitchFamily="34" charset="0"/>
-                <a:ea typeface="Trebuchet MS" pitchFamily="34" charset="-122"/>
-                <a:cs typeface="Trebuchet MS" pitchFamily="34" charset="-120"/>
-              </a:rPr>
-              <a:t>Phonemes</a:t>
-            </a:r>
-            <a:endParaRPr lang="en-US" sz="1100" dirty="0"/>
-          </a:p>
-        </p:txBody>
-      </p:sp>
-      <p:sp>
-        <p:nvSpPr>
-          <p:cNvPr id="41" name="Shape 39"/>
-          <p:cNvSpPr/>
-          <p:nvPr/>
-        </p:nvSpPr>
-        <p:spPr>
-          <a:xfrm>
-            <a:off x="1874520" y="4096512"/>
-            <a:ext cx="6903720" cy="804672"/>
-          </a:xfrm>
-          <a:prstGeom prst="rect">
-            <a:avLst>
-              <a:gd name="adj" fmla="val 6818"/>
-            </a:avLst>
-          </a:prstGeom>
-          <a:solidFill>
-            <a:srgbClr val="F8FAFC"/>
-          </a:solidFill>
-          <a:ln w="12700">
-            <a:solidFill>
-              <a:srgbClr val="E2E8F0"/>
-            </a:solidFill>
             <a:prstDash val="dash"/>
           </a:ln>
         </p:spPr>
       </p:sp>
       <p:sp>
         <p:nvSpPr>
-          <p:cNvPr id="42" name="Text 40"/>
+          <p:cNvPr id="39" name="Text 37"/>
           <p:cNvSpPr/>
           <p:nvPr/>
         </p:nvSpPr>
@@ -32267,7 +32354,7 @@
                 <a:ea typeface="Trebuchet MS" pitchFamily="34" charset="-122"/>
                 <a:cs typeface="Trebuchet MS" pitchFamily="34" charset="-120"/>
               </a:rPr>
-              <a:t>overflowing</a:t>
+              <a:t>overjoyed</a:t>
             </a:r>
             <a:endParaRPr lang="en-US" sz="2800" dirty="0"/>
           </a:p>
@@ -32445,7 +32532,7 @@
                 <a:ea typeface="Calibri" pitchFamily="34" charset="-122"/>
                 <a:cs typeface="Calibri" pitchFamily="34" charset="-120"/>
               </a:rPr>
-              <a:t>beyond, too much</a:t>
+              <a:t>too much / beyond</a:t>
             </a:r>
             <a:endParaRPr lang="en-US" sz="850" dirty="0"/>
           </a:p>
@@ -32518,7 +32605,7 @@
                 <a:ea typeface="Trebuchet MS" pitchFamily="34" charset="-122"/>
                 <a:cs typeface="Trebuchet MS" pitchFamily="34" charset="-120"/>
               </a:rPr>
-              <a:t>flow</a:t>
+              <a:t>joy</a:t>
             </a:r>
             <a:endParaRPr lang="en-US" sz="1300" dirty="0"/>
           </a:p>
@@ -32557,7 +32644,7 @@
                 <a:ea typeface="Calibri" pitchFamily="34" charset="-122"/>
                 <a:cs typeface="Calibri" pitchFamily="34" charset="-120"/>
               </a:rPr>
-              <a:t>to move like water</a:t>
+              <a:t>great happiness</a:t>
             </a:r>
             <a:endParaRPr lang="en-US" sz="850" dirty="0"/>
           </a:p>
@@ -32630,7 +32717,7 @@
                 <a:ea typeface="Trebuchet MS" pitchFamily="34" charset="-122"/>
                 <a:cs typeface="Trebuchet MS" pitchFamily="34" charset="-120"/>
               </a:rPr>
-              <a:t>ing</a:t>
+              <a:t>ed</a:t>
             </a:r>
             <a:endParaRPr lang="en-US" sz="1300" dirty="0"/>
           </a:p>
@@ -32669,7 +32756,7 @@
                 <a:ea typeface="Calibri" pitchFamily="34" charset="-122"/>
                 <a:cs typeface="Calibri" pitchFamily="34" charset="-120"/>
               </a:rPr>
-              <a:t>happening now</a:t>
+              <a:t>having a quality</a:t>
             </a:r>
             <a:endParaRPr lang="en-US" sz="850" dirty="0"/>
           </a:p>
@@ -32776,8 +32863,8 @@
         </p:nvSpPr>
         <p:spPr>
           <a:xfrm>
-            <a:off x="1975104" y="3364992"/>
-            <a:ext cx="1554480" cy="475488"/>
+            <a:off x="2313432" y="3364992"/>
+            <a:ext cx="1645920" cy="475488"/>
           </a:xfrm>
           <a:prstGeom prst="rect">
             <a:avLst>
@@ -32803,8 +32890,8 @@
         </p:nvSpPr>
         <p:spPr>
           <a:xfrm>
-            <a:off x="1975104" y="3364992"/>
-            <a:ext cx="1554480" cy="475488"/>
+            <a:off x="2313432" y="3364992"/>
+            <a:ext cx="1645920" cy="475488"/>
           </a:xfrm>
           <a:prstGeom prst="rect">
             <a:avLst/>
@@ -32842,8 +32929,8 @@
         </p:nvSpPr>
         <p:spPr>
           <a:xfrm>
-            <a:off x="3529584" y="3364992"/>
-            <a:ext cx="73152" cy="475488"/>
+            <a:off x="3959352" y="3364992"/>
+            <a:ext cx="411480" cy="475488"/>
           </a:xfrm>
           <a:prstGeom prst="rect">
             <a:avLst/>
@@ -32881,8 +32968,8 @@
         </p:nvSpPr>
         <p:spPr>
           <a:xfrm>
-            <a:off x="3602736" y="3364992"/>
-            <a:ext cx="1554480" cy="475488"/>
+            <a:off x="4370832" y="3364992"/>
+            <a:ext cx="1645920" cy="475488"/>
           </a:xfrm>
           <a:prstGeom prst="rect">
             <a:avLst>
@@ -32908,8 +32995,8 @@
         </p:nvSpPr>
         <p:spPr>
           <a:xfrm>
-            <a:off x="3602736" y="3364992"/>
-            <a:ext cx="1554480" cy="475488"/>
+            <a:off x="4370832" y="3364992"/>
+            <a:ext cx="1645920" cy="475488"/>
           </a:xfrm>
           <a:prstGeom prst="rect">
             <a:avLst/>
@@ -32947,8 +33034,8 @@
         </p:nvSpPr>
         <p:spPr>
           <a:xfrm>
-            <a:off x="5157216" y="3364992"/>
-            <a:ext cx="73152" cy="475488"/>
+            <a:off x="6016752" y="3364992"/>
+            <a:ext cx="411480" cy="475488"/>
           </a:xfrm>
           <a:prstGeom prst="rect">
             <a:avLst/>
@@ -32986,8 +33073,8 @@
         </p:nvSpPr>
         <p:spPr>
           <a:xfrm>
-            <a:off x="5230368" y="3364992"/>
-            <a:ext cx="1554480" cy="475488"/>
+            <a:off x="6428232" y="3364992"/>
+            <a:ext cx="1645920" cy="475488"/>
           </a:xfrm>
           <a:prstGeom prst="rect">
             <a:avLst>
@@ -33013,8 +33100,8 @@
         </p:nvSpPr>
         <p:spPr>
           <a:xfrm>
-            <a:off x="5230368" y="3364992"/>
-            <a:ext cx="1554480" cy="475488"/>
+            <a:off x="6428232" y="3364992"/>
+            <a:ext cx="1645920" cy="475488"/>
           </a:xfrm>
           <a:prstGeom prst="rect">
             <a:avLst/>
@@ -33038,7 +33125,7 @@
                 <a:ea typeface="Trebuchet MS" pitchFamily="34" charset="-122"/>
                 <a:cs typeface="Trebuchet MS" pitchFamily="34" charset="-120"/>
               </a:rPr>
-              <a:t>flow</a:t>
+              <a:t>joyed</a:t>
             </a:r>
             <a:endParaRPr lang="en-US" sz="1400" dirty="0"/>
           </a:p>
@@ -33046,211 +33133,238 @@
       </p:sp>
       <p:sp>
         <p:nvSpPr>
-          <p:cNvPr id="36" name="Text 34"/>
-          <p:cNvSpPr/>
-          <p:nvPr/>
-        </p:nvSpPr>
-        <p:spPr>
-          <a:xfrm>
-            <a:off x="6784848" y="3364992"/>
-            <a:ext cx="73152" cy="475488"/>
-          </a:xfrm>
-          <a:prstGeom prst="rect">
-            <a:avLst/>
-          </a:prstGeom>
-          <a:noFill/>
-          <a:ln/>
-        </p:spPr>
-        <p:txBody>
-          <a:bodyPr wrap="square" lIns="0" tIns="0" rIns="0" bIns="0" rtlCol="0" anchor="ctr"/>
-          <a:lstStyle/>
-          <a:p>
-            <a:pPr algn="ctr" indent="0" marL="0">
-              <a:buNone/>
-            </a:pPr>
-            <a:r>
-              <a:rPr lang="en-US" sz="1600" b="1" dirty="0">
-                <a:solidFill>
-                  <a:srgbClr val="0D9488"/>
+          <p:cNvPr id="36" name="Shape 34"/>
+          <p:cNvSpPr/>
+          <p:nvPr/>
+        </p:nvSpPr>
+        <p:spPr>
+          <a:xfrm>
+            <a:off x="365760" y="4096512"/>
+            <a:ext cx="1371600" cy="804672"/>
+          </a:xfrm>
+          <a:prstGeom prst="rect">
+            <a:avLst>
+              <a:gd name="adj" fmla="val 6818"/>
+            </a:avLst>
+          </a:prstGeom>
+          <a:solidFill>
+            <a:srgbClr val="E2E8F0"/>
+          </a:solidFill>
+          <a:ln w="12700">
+            <a:solidFill>
+              <a:srgbClr val="E2E8F0"/>
+            </a:solidFill>
+            <a:prstDash val="solid"/>
+          </a:ln>
+        </p:spPr>
+      </p:sp>
+      <p:sp>
+        <p:nvSpPr>
+          <p:cNvPr id="37" name="Text 35"/>
+          <p:cNvSpPr/>
+          <p:nvPr/>
+        </p:nvSpPr>
+        <p:spPr>
+          <a:xfrm>
+            <a:off x="365760" y="4096512"/>
+            <a:ext cx="1371600" cy="804672"/>
+          </a:xfrm>
+          <a:prstGeom prst="rect">
+            <a:avLst/>
+          </a:prstGeom>
+          <a:noFill/>
+          <a:ln/>
+        </p:spPr>
+        <p:txBody>
+          <a:bodyPr wrap="square" lIns="0" tIns="0" rIns="0" bIns="0" rtlCol="0" anchor="ctr"/>
+          <a:lstStyle/>
+          <a:p>
+            <a:pPr algn="ctr" indent="0" marL="0">
+              <a:buNone/>
+            </a:pPr>
+            <a:r>
+              <a:rPr lang="en-US" sz="1100" b="1" dirty="0">
+                <a:solidFill>
+                  <a:srgbClr val="475569"/>
                 </a:solidFill>
                 <a:latin typeface="Trebuchet MS" pitchFamily="34" charset="0"/>
                 <a:ea typeface="Trebuchet MS" pitchFamily="34" charset="-122"/>
                 <a:cs typeface="Trebuchet MS" pitchFamily="34" charset="-120"/>
               </a:rPr>
-              <a:t>·</a:t>
-            </a:r>
-            <a:endParaRPr lang="en-US" sz="1600" dirty="0"/>
-          </a:p>
-        </p:txBody>
-      </p:sp>
-      <p:sp>
-        <p:nvSpPr>
-          <p:cNvPr id="37" name="Shape 35"/>
-          <p:cNvSpPr/>
-          <p:nvPr/>
-        </p:nvSpPr>
-        <p:spPr>
-          <a:xfrm>
-            <a:off x="6858000" y="3364992"/>
-            <a:ext cx="1554480" cy="475488"/>
+              <a:t>Phonemes</a:t>
+            </a:r>
+            <a:endParaRPr lang="en-US" sz="1100" dirty="0"/>
+          </a:p>
+        </p:txBody>
+      </p:sp>
+      <p:sp>
+        <p:nvSpPr>
+          <p:cNvPr id="38" name="Shape 36"/>
+          <p:cNvSpPr/>
+          <p:nvPr/>
+        </p:nvSpPr>
+        <p:spPr>
+          <a:xfrm>
+            <a:off x="1874520" y="4096512"/>
+            <a:ext cx="6903720" cy="658368"/>
           </a:xfrm>
           <a:prstGeom prst="rect">
             <a:avLst>
-              <a:gd name="adj" fmla="val 9615"/>
+              <a:gd name="adj" fmla="val 8333"/>
             </a:avLst>
           </a:prstGeom>
           <a:solidFill>
+            <a:srgbClr val="FCE7F3"/>
+          </a:solidFill>
+          <a:ln w="12700">
+            <a:solidFill>
+              <a:srgbClr val="DB2777"/>
+            </a:solidFill>
+            <a:prstDash val="solid"/>
+          </a:ln>
+        </p:spPr>
+      </p:sp>
+      <p:sp>
+        <p:nvSpPr>
+          <p:cNvPr id="39" name="Shape 37"/>
+          <p:cNvSpPr/>
+          <p:nvPr/>
+        </p:nvSpPr>
+        <p:spPr>
+          <a:xfrm>
+            <a:off x="2254649" y="4169664"/>
+            <a:ext cx="685800" cy="475488"/>
+          </a:xfrm>
+          <a:prstGeom prst="rect">
+            <a:avLst>
+              <a:gd name="adj" fmla="val 7692"/>
+            </a:avLst>
+          </a:prstGeom>
+          <a:solidFill>
             <a:srgbClr val="FFFFFF"/>
           </a:solidFill>
           <a:ln w="12700">
             <a:solidFill>
-              <a:srgbClr val="0D9488"/>
-            </a:solidFill>
-            <a:prstDash val="solid"/>
-          </a:ln>
-        </p:spPr>
-      </p:sp>
-      <p:sp>
-        <p:nvSpPr>
-          <p:cNvPr id="38" name="Text 36"/>
-          <p:cNvSpPr/>
-          <p:nvPr/>
-        </p:nvSpPr>
-        <p:spPr>
-          <a:xfrm>
-            <a:off x="6858000" y="3364992"/>
-            <a:ext cx="1554480" cy="475488"/>
-          </a:xfrm>
-          <a:prstGeom prst="rect">
-            <a:avLst/>
-          </a:prstGeom>
-          <a:noFill/>
-          <a:ln/>
-        </p:spPr>
-        <p:txBody>
-          <a:bodyPr wrap="square" lIns="0" tIns="0" rIns="0" bIns="0" rtlCol="0" anchor="ctr"/>
-          <a:lstStyle/>
-          <a:p>
-            <a:pPr algn="ctr" indent="0" marL="0">
-              <a:buNone/>
-            </a:pPr>
-            <a:r>
-              <a:rPr lang="en-US" sz="1400" b="1" dirty="0">
-                <a:solidFill>
-                  <a:srgbClr val="0D9488"/>
+              <a:srgbClr val="DB2777"/>
+            </a:solidFill>
+            <a:prstDash val="solid"/>
+          </a:ln>
+        </p:spPr>
+      </p:sp>
+      <p:sp>
+        <p:nvSpPr>
+          <p:cNvPr id="40" name="Text 38"/>
+          <p:cNvSpPr/>
+          <p:nvPr/>
+        </p:nvSpPr>
+        <p:spPr>
+          <a:xfrm>
+            <a:off x="2254649" y="4169664"/>
+            <a:ext cx="685800" cy="475488"/>
+          </a:xfrm>
+          <a:prstGeom prst="rect">
+            <a:avLst/>
+          </a:prstGeom>
+          <a:noFill/>
+          <a:ln/>
+        </p:spPr>
+        <p:txBody>
+          <a:bodyPr wrap="square" lIns="0" tIns="0" rIns="0" bIns="0" rtlCol="0" anchor="ctr"/>
+          <a:lstStyle/>
+          <a:p>
+            <a:pPr algn="ctr" indent="0" marL="0">
+              <a:buNone/>
+            </a:pPr>
+            <a:r>
+              <a:rPr lang="en-US" sz="900" b="1" dirty="0">
+                <a:solidFill>
+                  <a:srgbClr val="9D174D"/>
                 </a:solidFill>
                 <a:latin typeface="Trebuchet MS" pitchFamily="34" charset="0"/>
                 <a:ea typeface="Trebuchet MS" pitchFamily="34" charset="-122"/>
                 <a:cs typeface="Trebuchet MS" pitchFamily="34" charset="-120"/>
               </a:rPr>
-              <a:t>ing</a:t>
-            </a:r>
-            <a:endParaRPr lang="en-US" sz="1400" dirty="0"/>
-          </a:p>
-        </p:txBody>
-      </p:sp>
-      <p:sp>
-        <p:nvSpPr>
-          <p:cNvPr id="39" name="Shape 37"/>
-          <p:cNvSpPr/>
-          <p:nvPr/>
-        </p:nvSpPr>
-        <p:spPr>
-          <a:xfrm>
-            <a:off x="365760" y="4096512"/>
-            <a:ext cx="1371600" cy="804672"/>
+              <a:t>o</a:t>
+            </a:r>
+            <a:endParaRPr lang="en-US" sz="900" dirty="0"/>
+          </a:p>
+        </p:txBody>
+      </p:sp>
+      <p:sp>
+        <p:nvSpPr>
+          <p:cNvPr id="41" name="Shape 39"/>
+          <p:cNvSpPr/>
+          <p:nvPr/>
+        </p:nvSpPr>
+        <p:spPr>
+          <a:xfrm>
+            <a:off x="3293146" y="4169664"/>
+            <a:ext cx="685800" cy="475488"/>
           </a:xfrm>
           <a:prstGeom prst="rect">
             <a:avLst>
-              <a:gd name="adj" fmla="val 6818"/>
+              <a:gd name="adj" fmla="val 7692"/>
             </a:avLst>
           </a:prstGeom>
           <a:solidFill>
-            <a:srgbClr val="E2E8F0"/>
-          </a:solidFill>
-          <a:ln w="12700">
-            <a:solidFill>
-              <a:srgbClr val="E2E8F0"/>
-            </a:solidFill>
-            <a:prstDash val="solid"/>
-          </a:ln>
-        </p:spPr>
-      </p:sp>
-      <p:sp>
-        <p:nvSpPr>
-          <p:cNvPr id="40" name="Text 38"/>
-          <p:cNvSpPr/>
-          <p:nvPr/>
-        </p:nvSpPr>
-        <p:spPr>
-          <a:xfrm>
-            <a:off x="365760" y="4096512"/>
-            <a:ext cx="1371600" cy="804672"/>
-          </a:xfrm>
-          <a:prstGeom prst="rect">
-            <a:avLst/>
-          </a:prstGeom>
-          <a:noFill/>
-          <a:ln/>
-        </p:spPr>
-        <p:txBody>
-          <a:bodyPr wrap="square" lIns="0" tIns="0" rIns="0" bIns="0" rtlCol="0" anchor="ctr"/>
-          <a:lstStyle/>
-          <a:p>
-            <a:pPr algn="ctr" indent="0" marL="0">
-              <a:buNone/>
-            </a:pPr>
-            <a:r>
-              <a:rPr lang="en-US" sz="1100" b="1" dirty="0">
-                <a:solidFill>
-                  <a:srgbClr val="475569"/>
+            <a:srgbClr val="FFFFFF"/>
+          </a:solidFill>
+          <a:ln w="12700">
+            <a:solidFill>
+              <a:srgbClr val="DB2777"/>
+            </a:solidFill>
+            <a:prstDash val="solid"/>
+          </a:ln>
+        </p:spPr>
+      </p:sp>
+      <p:sp>
+        <p:nvSpPr>
+          <p:cNvPr id="42" name="Text 40"/>
+          <p:cNvSpPr/>
+          <p:nvPr/>
+        </p:nvSpPr>
+        <p:spPr>
+          <a:xfrm>
+            <a:off x="3293146" y="4169664"/>
+            <a:ext cx="685800" cy="475488"/>
+          </a:xfrm>
+          <a:prstGeom prst="rect">
+            <a:avLst/>
+          </a:prstGeom>
+          <a:noFill/>
+          <a:ln/>
+        </p:spPr>
+        <p:txBody>
+          <a:bodyPr wrap="square" lIns="0" tIns="0" rIns="0" bIns="0" rtlCol="0" anchor="ctr"/>
+          <a:lstStyle/>
+          <a:p>
+            <a:pPr algn="ctr" indent="0" marL="0">
+              <a:buNone/>
+            </a:pPr>
+            <a:r>
+              <a:rPr lang="en-US" sz="900" b="1" dirty="0">
+                <a:solidFill>
+                  <a:srgbClr val="9D174D"/>
                 </a:solidFill>
                 <a:latin typeface="Trebuchet MS" pitchFamily="34" charset="0"/>
                 <a:ea typeface="Trebuchet MS" pitchFamily="34" charset="-122"/>
                 <a:cs typeface="Trebuchet MS" pitchFamily="34" charset="-120"/>
               </a:rPr>
-              <a:t>Phonemes</a:t>
-            </a:r>
-            <a:endParaRPr lang="en-US" sz="1100" dirty="0"/>
-          </a:p>
-        </p:txBody>
-      </p:sp>
-      <p:sp>
-        <p:nvSpPr>
-          <p:cNvPr id="41" name="Shape 39"/>
-          <p:cNvSpPr/>
-          <p:nvPr/>
-        </p:nvSpPr>
-        <p:spPr>
-          <a:xfrm>
-            <a:off x="1874520" y="4096512"/>
-            <a:ext cx="6903720" cy="658368"/>
-          </a:xfrm>
-          <a:prstGeom prst="rect">
-            <a:avLst>
-              <a:gd name="adj" fmla="val 8333"/>
-            </a:avLst>
-          </a:prstGeom>
-          <a:solidFill>
-            <a:srgbClr val="FCE7F3"/>
-          </a:solidFill>
-          <a:ln w="12700">
-            <a:solidFill>
-              <a:srgbClr val="DB2777"/>
-            </a:solidFill>
-            <a:prstDash val="solid"/>
-          </a:ln>
-        </p:spPr>
-      </p:sp>
-      <p:sp>
-        <p:nvSpPr>
-          <p:cNvPr id="42" name="Shape 40"/>
-          <p:cNvSpPr/>
-          <p:nvPr/>
-        </p:nvSpPr>
-        <p:spPr>
-          <a:xfrm>
-            <a:off x="2023872" y="4169664"/>
+              <a:t>v</a:t>
+            </a:r>
+            <a:endParaRPr lang="en-US" sz="900" dirty="0"/>
+          </a:p>
+        </p:txBody>
+      </p:sp>
+      <p:sp>
+        <p:nvSpPr>
+          <p:cNvPr id="43" name="Shape 41"/>
+          <p:cNvSpPr/>
+          <p:nvPr/>
+        </p:nvSpPr>
+        <p:spPr>
+          <a:xfrm>
+            <a:off x="4331643" y="4169664"/>
             <a:ext cx="685800" cy="475488"/>
           </a:xfrm>
           <a:prstGeom prst="rect">
@@ -33271,13 +33385,13 @@
       </p:sp>
       <p:sp>
         <p:nvSpPr>
-          <p:cNvPr id="43" name="Text 41"/>
-          <p:cNvSpPr/>
-          <p:nvPr/>
-        </p:nvSpPr>
-        <p:spPr>
-          <a:xfrm>
-            <a:off x="2023872" y="4169664"/>
+          <p:cNvPr id="44" name="Text 42"/>
+          <p:cNvSpPr/>
+          <p:nvPr/>
+        </p:nvSpPr>
+        <p:spPr>
+          <a:xfrm>
+            <a:off x="4331643" y="4169664"/>
             <a:ext cx="685800" cy="475488"/>
           </a:xfrm>
           <a:prstGeom prst="rect">
@@ -33302,7 +33416,7 @@
                 <a:ea typeface="Trebuchet MS" pitchFamily="34" charset="-122"/>
                 <a:cs typeface="Trebuchet MS" pitchFamily="34" charset="-120"/>
               </a:rPr>
-              <a:t>o</a:t>
+              <a:t>er</a:t>
             </a:r>
             <a:endParaRPr lang="en-US" sz="900" dirty="0"/>
           </a:p>
@@ -33310,13 +33424,13 @@
       </p:sp>
       <p:sp>
         <p:nvSpPr>
-          <p:cNvPr id="44" name="Shape 42"/>
-          <p:cNvSpPr/>
-          <p:nvPr/>
-        </p:nvSpPr>
-        <p:spPr>
-          <a:xfrm>
-            <a:off x="2831592" y="4169664"/>
+          <p:cNvPr id="45" name="Shape 43"/>
+          <p:cNvSpPr/>
+          <p:nvPr/>
+        </p:nvSpPr>
+        <p:spPr>
+          <a:xfrm>
+            <a:off x="5370141" y="4169664"/>
             <a:ext cx="685800" cy="475488"/>
           </a:xfrm>
           <a:prstGeom prst="rect">
@@ -33337,13 +33451,13 @@
       </p:sp>
       <p:sp>
         <p:nvSpPr>
-          <p:cNvPr id="45" name="Text 43"/>
-          <p:cNvSpPr/>
-          <p:nvPr/>
-        </p:nvSpPr>
-        <p:spPr>
-          <a:xfrm>
-            <a:off x="2831592" y="4169664"/>
+          <p:cNvPr id="46" name="Text 44"/>
+          <p:cNvSpPr/>
+          <p:nvPr/>
+        </p:nvSpPr>
+        <p:spPr>
+          <a:xfrm>
+            <a:off x="5370141" y="4169664"/>
             <a:ext cx="685800" cy="475488"/>
           </a:xfrm>
           <a:prstGeom prst="rect">
@@ -33368,7 +33482,7 @@
                 <a:ea typeface="Trebuchet MS" pitchFamily="34" charset="-122"/>
                 <a:cs typeface="Trebuchet MS" pitchFamily="34" charset="-120"/>
               </a:rPr>
-              <a:t>v</a:t>
+              <a:t>j</a:t>
             </a:r>
             <a:endParaRPr lang="en-US" sz="900" dirty="0"/>
           </a:p>
@@ -33376,13 +33490,13 @@
       </p:sp>
       <p:sp>
         <p:nvSpPr>
-          <p:cNvPr id="46" name="Shape 44"/>
-          <p:cNvSpPr/>
-          <p:nvPr/>
-        </p:nvSpPr>
-        <p:spPr>
-          <a:xfrm>
-            <a:off x="3639312" y="4169664"/>
+          <p:cNvPr id="47" name="Shape 45"/>
+          <p:cNvSpPr/>
+          <p:nvPr/>
+        </p:nvSpPr>
+        <p:spPr>
+          <a:xfrm>
+            <a:off x="6408638" y="4169664"/>
             <a:ext cx="685800" cy="475488"/>
           </a:xfrm>
           <a:prstGeom prst="rect">
@@ -33403,13 +33517,13 @@
       </p:sp>
       <p:sp>
         <p:nvSpPr>
-          <p:cNvPr id="47" name="Text 45"/>
-          <p:cNvSpPr/>
-          <p:nvPr/>
-        </p:nvSpPr>
-        <p:spPr>
-          <a:xfrm>
-            <a:off x="3639312" y="4169664"/>
+          <p:cNvPr id="48" name="Text 46"/>
+          <p:cNvSpPr/>
+          <p:nvPr/>
+        </p:nvSpPr>
+        <p:spPr>
+          <a:xfrm>
+            <a:off x="6408638" y="4169664"/>
             <a:ext cx="685800" cy="475488"/>
           </a:xfrm>
           <a:prstGeom prst="rect">
@@ -33434,7 +33548,7 @@
                 <a:ea typeface="Trebuchet MS" pitchFamily="34" charset="-122"/>
                 <a:cs typeface="Trebuchet MS" pitchFamily="34" charset="-120"/>
               </a:rPr>
-              <a:t>er</a:t>
+              <a:t>oy</a:t>
             </a:r>
             <a:endParaRPr lang="en-US" sz="900" dirty="0"/>
           </a:p>
@@ -33442,13 +33556,13 @@
       </p:sp>
       <p:sp>
         <p:nvSpPr>
-          <p:cNvPr id="48" name="Shape 46"/>
-          <p:cNvSpPr/>
-          <p:nvPr/>
-        </p:nvSpPr>
-        <p:spPr>
-          <a:xfrm>
-            <a:off x="4447032" y="4169664"/>
+          <p:cNvPr id="49" name="Shape 47"/>
+          <p:cNvSpPr/>
+          <p:nvPr/>
+        </p:nvSpPr>
+        <p:spPr>
+          <a:xfrm>
+            <a:off x="7447135" y="4169664"/>
             <a:ext cx="685800" cy="475488"/>
           </a:xfrm>
           <a:prstGeom prst="rect">
@@ -33469,13 +33583,13 @@
       </p:sp>
       <p:sp>
         <p:nvSpPr>
-          <p:cNvPr id="49" name="Text 47"/>
-          <p:cNvSpPr/>
-          <p:nvPr/>
-        </p:nvSpPr>
-        <p:spPr>
-          <a:xfrm>
-            <a:off x="4447032" y="4169664"/>
+          <p:cNvPr id="50" name="Text 48"/>
+          <p:cNvSpPr/>
+          <p:nvPr/>
+        </p:nvSpPr>
+        <p:spPr>
+          <a:xfrm>
+            <a:off x="7447135" y="4169664"/>
             <a:ext cx="685800" cy="475488"/>
           </a:xfrm>
           <a:prstGeom prst="rect">
@@ -33500,271 +33614,7 @@
                 <a:ea typeface="Trebuchet MS" pitchFamily="34" charset="-122"/>
                 <a:cs typeface="Trebuchet MS" pitchFamily="34" charset="-120"/>
               </a:rPr>
-              <a:t>f</a:t>
-            </a:r>
-            <a:endParaRPr lang="en-US" sz="900" dirty="0"/>
-          </a:p>
-        </p:txBody>
-      </p:sp>
-      <p:sp>
-        <p:nvSpPr>
-          <p:cNvPr id="50" name="Shape 48"/>
-          <p:cNvSpPr/>
-          <p:nvPr/>
-        </p:nvSpPr>
-        <p:spPr>
-          <a:xfrm>
-            <a:off x="5254752" y="4169664"/>
-            <a:ext cx="685800" cy="475488"/>
-          </a:xfrm>
-          <a:prstGeom prst="rect">
-            <a:avLst>
-              <a:gd name="adj" fmla="val 7692"/>
-            </a:avLst>
-          </a:prstGeom>
-          <a:solidFill>
-            <a:srgbClr val="FFFFFF"/>
-          </a:solidFill>
-          <a:ln w="12700">
-            <a:solidFill>
-              <a:srgbClr val="DB2777"/>
-            </a:solidFill>
-            <a:prstDash val="solid"/>
-          </a:ln>
-        </p:spPr>
-      </p:sp>
-      <p:sp>
-        <p:nvSpPr>
-          <p:cNvPr id="51" name="Text 49"/>
-          <p:cNvSpPr/>
-          <p:nvPr/>
-        </p:nvSpPr>
-        <p:spPr>
-          <a:xfrm>
-            <a:off x="5254752" y="4169664"/>
-            <a:ext cx="685800" cy="475488"/>
-          </a:xfrm>
-          <a:prstGeom prst="rect">
-            <a:avLst/>
-          </a:prstGeom>
-          <a:noFill/>
-          <a:ln/>
-        </p:spPr>
-        <p:txBody>
-          <a:bodyPr wrap="square" lIns="0" tIns="0" rIns="0" bIns="0" rtlCol="0" anchor="ctr"/>
-          <a:lstStyle/>
-          <a:p>
-            <a:pPr algn="ctr" indent="0" marL="0">
-              <a:buNone/>
-            </a:pPr>
-            <a:r>
-              <a:rPr lang="en-US" sz="900" b="1" dirty="0">
-                <a:solidFill>
-                  <a:srgbClr val="9D174D"/>
-                </a:solidFill>
-                <a:latin typeface="Trebuchet MS" pitchFamily="34" charset="0"/>
-                <a:ea typeface="Trebuchet MS" pitchFamily="34" charset="-122"/>
-                <a:cs typeface="Trebuchet MS" pitchFamily="34" charset="-120"/>
-              </a:rPr>
-              <a:t>l</a:t>
-            </a:r>
-            <a:endParaRPr lang="en-US" sz="900" dirty="0"/>
-          </a:p>
-        </p:txBody>
-      </p:sp>
-      <p:sp>
-        <p:nvSpPr>
-          <p:cNvPr id="52" name="Shape 50"/>
-          <p:cNvSpPr/>
-          <p:nvPr/>
-        </p:nvSpPr>
-        <p:spPr>
-          <a:xfrm>
-            <a:off x="6062472" y="4169664"/>
-            <a:ext cx="685800" cy="475488"/>
-          </a:xfrm>
-          <a:prstGeom prst="rect">
-            <a:avLst>
-              <a:gd name="adj" fmla="val 7692"/>
-            </a:avLst>
-          </a:prstGeom>
-          <a:solidFill>
-            <a:srgbClr val="FFFFFF"/>
-          </a:solidFill>
-          <a:ln w="12700">
-            <a:solidFill>
-              <a:srgbClr val="DB2777"/>
-            </a:solidFill>
-            <a:prstDash val="solid"/>
-          </a:ln>
-        </p:spPr>
-      </p:sp>
-      <p:sp>
-        <p:nvSpPr>
-          <p:cNvPr id="53" name="Text 51"/>
-          <p:cNvSpPr/>
-          <p:nvPr/>
-        </p:nvSpPr>
-        <p:spPr>
-          <a:xfrm>
-            <a:off x="6062472" y="4169664"/>
-            <a:ext cx="685800" cy="475488"/>
-          </a:xfrm>
-          <a:prstGeom prst="rect">
-            <a:avLst/>
-          </a:prstGeom>
-          <a:noFill/>
-          <a:ln/>
-        </p:spPr>
-        <p:txBody>
-          <a:bodyPr wrap="square" lIns="0" tIns="0" rIns="0" bIns="0" rtlCol="0" anchor="ctr"/>
-          <a:lstStyle/>
-          <a:p>
-            <a:pPr algn="ctr" indent="0" marL="0">
-              <a:buNone/>
-            </a:pPr>
-            <a:r>
-              <a:rPr lang="en-US" sz="900" b="1" dirty="0">
-                <a:solidFill>
-                  <a:srgbClr val="9D174D"/>
-                </a:solidFill>
-                <a:latin typeface="Trebuchet MS" pitchFamily="34" charset="0"/>
-                <a:ea typeface="Trebuchet MS" pitchFamily="34" charset="-122"/>
-                <a:cs typeface="Trebuchet MS" pitchFamily="34" charset="-120"/>
-              </a:rPr>
-              <a:t>ow</a:t>
-            </a:r>
-            <a:endParaRPr lang="en-US" sz="900" dirty="0"/>
-          </a:p>
-        </p:txBody>
-      </p:sp>
-      <p:sp>
-        <p:nvSpPr>
-          <p:cNvPr id="54" name="Shape 52"/>
-          <p:cNvSpPr/>
-          <p:nvPr/>
-        </p:nvSpPr>
-        <p:spPr>
-          <a:xfrm>
-            <a:off x="6870192" y="4169664"/>
-            <a:ext cx="685800" cy="475488"/>
-          </a:xfrm>
-          <a:prstGeom prst="rect">
-            <a:avLst>
-              <a:gd name="adj" fmla="val 7692"/>
-            </a:avLst>
-          </a:prstGeom>
-          <a:solidFill>
-            <a:srgbClr val="FFFFFF"/>
-          </a:solidFill>
-          <a:ln w="12700">
-            <a:solidFill>
-              <a:srgbClr val="DB2777"/>
-            </a:solidFill>
-            <a:prstDash val="solid"/>
-          </a:ln>
-        </p:spPr>
-      </p:sp>
-      <p:sp>
-        <p:nvSpPr>
-          <p:cNvPr id="55" name="Text 53"/>
-          <p:cNvSpPr/>
-          <p:nvPr/>
-        </p:nvSpPr>
-        <p:spPr>
-          <a:xfrm>
-            <a:off x="6870192" y="4169664"/>
-            <a:ext cx="685800" cy="475488"/>
-          </a:xfrm>
-          <a:prstGeom prst="rect">
-            <a:avLst/>
-          </a:prstGeom>
-          <a:noFill/>
-          <a:ln/>
-        </p:spPr>
-        <p:txBody>
-          <a:bodyPr wrap="square" lIns="0" tIns="0" rIns="0" bIns="0" rtlCol="0" anchor="ctr"/>
-          <a:lstStyle/>
-          <a:p>
-            <a:pPr algn="ctr" indent="0" marL="0">
-              <a:buNone/>
-            </a:pPr>
-            <a:r>
-              <a:rPr lang="en-US" sz="900" b="1" dirty="0">
-                <a:solidFill>
-                  <a:srgbClr val="9D174D"/>
-                </a:solidFill>
-                <a:latin typeface="Trebuchet MS" pitchFamily="34" charset="0"/>
-                <a:ea typeface="Trebuchet MS" pitchFamily="34" charset="-122"/>
-                <a:cs typeface="Trebuchet MS" pitchFamily="34" charset="-120"/>
-              </a:rPr>
-              <a:t>i</a:t>
-            </a:r>
-            <a:endParaRPr lang="en-US" sz="900" dirty="0"/>
-          </a:p>
-        </p:txBody>
-      </p:sp>
-      <p:sp>
-        <p:nvSpPr>
-          <p:cNvPr id="56" name="Shape 54"/>
-          <p:cNvSpPr/>
-          <p:nvPr/>
-        </p:nvSpPr>
-        <p:spPr>
-          <a:xfrm>
-            <a:off x="7677912" y="4169664"/>
-            <a:ext cx="685800" cy="475488"/>
-          </a:xfrm>
-          <a:prstGeom prst="rect">
-            <a:avLst>
-              <a:gd name="adj" fmla="val 7692"/>
-            </a:avLst>
-          </a:prstGeom>
-          <a:solidFill>
-            <a:srgbClr val="FFFFFF"/>
-          </a:solidFill>
-          <a:ln w="12700">
-            <a:solidFill>
-              <a:srgbClr val="DB2777"/>
-            </a:solidFill>
-            <a:prstDash val="solid"/>
-          </a:ln>
-        </p:spPr>
-      </p:sp>
-      <p:sp>
-        <p:nvSpPr>
-          <p:cNvPr id="57" name="Text 55"/>
-          <p:cNvSpPr/>
-          <p:nvPr/>
-        </p:nvSpPr>
-        <p:spPr>
-          <a:xfrm>
-            <a:off x="7677912" y="4169664"/>
-            <a:ext cx="685800" cy="475488"/>
-          </a:xfrm>
-          <a:prstGeom prst="rect">
-            <a:avLst/>
-          </a:prstGeom>
-          <a:noFill/>
-          <a:ln/>
-        </p:spPr>
-        <p:txBody>
-          <a:bodyPr wrap="square" lIns="0" tIns="0" rIns="0" bIns="0" rtlCol="0" anchor="ctr"/>
-          <a:lstStyle/>
-          <a:p>
-            <a:pPr algn="ctr" indent="0" marL="0">
-              <a:buNone/>
-            </a:pPr>
-            <a:r>
-              <a:rPr lang="en-US" sz="900" b="1" dirty="0">
-                <a:solidFill>
-                  <a:srgbClr val="9D174D"/>
-                </a:solidFill>
-                <a:latin typeface="Trebuchet MS" pitchFamily="34" charset="0"/>
-                <a:ea typeface="Trebuchet MS" pitchFamily="34" charset="-122"/>
-                <a:cs typeface="Trebuchet MS" pitchFamily="34" charset="-120"/>
-              </a:rPr>
-              <a:t>ng</a:t>
+              <a:t>ed</a:t>
             </a:r>
             <a:endParaRPr lang="en-US" sz="900" dirty="0"/>
           </a:p>
@@ -35590,7 +35440,7 @@
                 <a:ea typeface="Trebuchet MS" pitchFamily="34" charset="-122"/>
                 <a:cs typeface="Trebuchet MS" pitchFamily="34" charset="-120"/>
               </a:rPr>
-              <a:t>flow</a:t>
+              <a:t>load</a:t>
             </a:r>
             <a:endParaRPr lang="en-US" sz="1300" dirty="0"/>
           </a:p>
@@ -35743,7 +35593,7 @@
                 <a:ea typeface="Trebuchet MS" pitchFamily="34" charset="-122"/>
                 <a:cs typeface="Trebuchet MS" pitchFamily="34" charset="-120"/>
               </a:rPr>
-              <a:t>load</a:t>
+              <a:t>flow</a:t>
             </a:r>
             <a:endParaRPr lang="en-US" sz="1300" dirty="0"/>
           </a:p>
@@ -36049,7 +35899,7 @@
                 <a:ea typeface="Trebuchet MS" pitchFamily="34" charset="-122"/>
                 <a:cs typeface="Trebuchet MS" pitchFamily="34" charset="-120"/>
               </a:rPr>
-              <a:t>sleep</a:t>
+              <a:t>come</a:t>
             </a:r>
             <a:endParaRPr lang="en-US" sz="1300" dirty="0"/>
           </a:p>
@@ -36202,7 +36052,7 @@
                 <a:ea typeface="Trebuchet MS" pitchFamily="34" charset="-122"/>
                 <a:cs typeface="Trebuchet MS" pitchFamily="34" charset="-120"/>
               </a:rPr>
-              <a:t>turn</a:t>
+              <a:t>sleep</a:t>
             </a:r>
             <a:endParaRPr lang="en-US" sz="1300" dirty="0"/>
           </a:p>
@@ -36371,7 +36221,7 @@
                 <a:ea typeface="Trebuchet MS" pitchFamily="34" charset="-122"/>
                 <a:cs typeface="Trebuchet MS" pitchFamily="34" charset="-120"/>
               </a:rPr>
-              <a:t>overflow</a:t>
+              <a:t>overload</a:t>
             </a:r>
             <a:endParaRPr lang="en-US" sz="1200" dirty="0"/>
           </a:p>
@@ -36437,7 +36287,7 @@
                 <a:ea typeface="Trebuchet MS" pitchFamily="34" charset="-122"/>
                 <a:cs typeface="Trebuchet MS" pitchFamily="34" charset="-120"/>
               </a:rPr>
-              <a:t>overload</a:t>
+              <a:t>overflow</a:t>
             </a:r>
             <a:endParaRPr lang="en-US" sz="1200" dirty="0"/>
           </a:p>
@@ -36569,7 +36419,7 @@
                 <a:ea typeface="Trebuchet MS" pitchFamily="34" charset="-122"/>
                 <a:cs typeface="Trebuchet MS" pitchFamily="34" charset="-120"/>
               </a:rPr>
-              <a:t>oversleep</a:t>
+              <a:t>overcome</a:t>
             </a:r>
             <a:endParaRPr lang="en-US" sz="1200" dirty="0"/>
           </a:p>
@@ -36635,7 +36485,7 @@
                 <a:ea typeface="Trebuchet MS" pitchFamily="34" charset="-122"/>
                 <a:cs typeface="Trebuchet MS" pitchFamily="34" charset="-120"/>
               </a:rPr>
-              <a:t>overturn</a:t>
+              <a:t>oversleep</a:t>
             </a:r>
             <a:endParaRPr lang="en-US" sz="1200" dirty="0"/>
           </a:p>
@@ -36701,7 +36551,7 @@
                 <a:ea typeface="Trebuchet MS" pitchFamily="34" charset="-122"/>
                 <a:cs typeface="Trebuchet MS" pitchFamily="34" charset="-120"/>
               </a:rPr>
-              <a:t>overcome</a:t>
+              <a:t>overdue</a:t>
             </a:r>
             <a:endParaRPr lang="en-US" sz="1200" dirty="0"/>
           </a:p>
@@ -36833,7 +36683,7 @@
                 <a:ea typeface="Trebuchet MS" pitchFamily="34" charset="-122"/>
                 <a:cs typeface="Trebuchet MS" pitchFamily="34" charset="-120"/>
               </a:rPr>
-              <a:t>overdue</a:t>
+              <a:t>overpower</a:t>
             </a:r>
             <a:endParaRPr lang="en-US" sz="1200" dirty="0"/>
           </a:p>
@@ -37453,7 +37303,7 @@
                 <a:ea typeface="Calibri" pitchFamily="34" charset="-122"/>
                 <a:cs typeface="Calibri" pitchFamily="34" charset="-120"/>
               </a:rPr>
-              <a:t>The core part of a word carrying its basic meaning. In 'overflow', the root is the part after the prefix 'over-'.</a:t>
+              <a:t>The core part of a word carrying its basic meaning. In 'overload', the root is the part after the prefix 'over-'.</a:t>
             </a:r>
             <a:endParaRPr lang="en-US" sz="1350" dirty="0"/>
           </a:p>
@@ -38021,7 +37871,7 @@
                 <a:ea typeface="Calibri" pitchFamily="34" charset="-122"/>
                 <a:cs typeface="Calibri" pitchFamily="34" charset="-120"/>
               </a:rPr>
-              <a:t>1.  The prefix 'over-' can mean something is too much or beyond normal.</a:t>
+              <a:t>1.  The prefix 'over-' can mean too much, as in overeat.</a:t>
             </a:r>
             <a:endParaRPr lang="en-US" sz="1300" dirty="0"/>
           </a:p>
@@ -38160,7 +38010,7 @@
                 <a:ea typeface="Calibri" pitchFamily="34" charset="-122"/>
                 <a:cs typeface="Calibri" pitchFamily="34" charset="-120"/>
               </a:rPr>
-              <a:t>2.  The word 'overjoyed' means feeling very sad.</a:t>
+              <a:t>2.  'Oversleep' means to sleep longer than planned.</a:t>
             </a:r>
             <a:endParaRPr lang="en-US" sz="1300" dirty="0"/>
           </a:p>
@@ -38183,11 +38033,11 @@
             </a:avLst>
           </a:prstGeom>
           <a:solidFill>
-            <a:srgbClr val="FEE2E2"/>
-          </a:solidFill>
-          <a:ln w="12700">
-            <a:solidFill>
-              <a:srgbClr val="DC2626"/>
+            <a:srgbClr val="DCFCE7"/>
+          </a:solidFill>
+          <a:ln w="12700">
+            <a:solidFill>
+              <a:srgbClr val="16A34A"/>
             </a:solidFill>
             <a:prstDash val="solid"/>
           </a:ln>
@@ -38220,13 +38070,13 @@
             <a:r>
               <a:rPr lang="en-US" sz="1100" b="1" dirty="0">
                 <a:solidFill>
-                  <a:srgbClr val="DC2626"/>
+                  <a:srgbClr val="16A34A"/>
                 </a:solidFill>
                 <a:latin typeface="Trebuchet MS" pitchFamily="34" charset="0"/>
                 <a:ea typeface="Trebuchet MS" pitchFamily="34" charset="-122"/>
                 <a:cs typeface="Trebuchet MS" pitchFamily="34" charset="-120"/>
               </a:rPr>
-              <a:t>FALSE</a:t>
+              <a:t>TRUE</a:t>
             </a:r>
             <a:endParaRPr lang="en-US" sz="1100" dirty="0"/>
           </a:p>
@@ -38299,7 +38149,7 @@
                 <a:ea typeface="Calibri" pitchFamily="34" charset="-122"/>
                 <a:cs typeface="Calibri" pitchFamily="34" charset="-120"/>
               </a:rPr>
-              <a:t>3.  Adding 'over-' to 'sleep' makes a word meaning to sleep too long.</a:t>
+              <a:t>3.  The prefix 'over-' comes from a Greek word.</a:t>
             </a:r>
             <a:endParaRPr lang="en-US" sz="1300" dirty="0"/>
           </a:p>
@@ -38322,11 +38172,11 @@
             </a:avLst>
           </a:prstGeom>
           <a:solidFill>
-            <a:srgbClr val="DCFCE7"/>
-          </a:solidFill>
-          <a:ln w="12700">
-            <a:solidFill>
-              <a:srgbClr val="16A34A"/>
+            <a:srgbClr val="FEE2E2"/>
+          </a:solidFill>
+          <a:ln w="12700">
+            <a:solidFill>
+              <a:srgbClr val="DC2626"/>
             </a:solidFill>
             <a:prstDash val="solid"/>
           </a:ln>
@@ -38359,13 +38209,13 @@
             <a:r>
               <a:rPr lang="en-US" sz="1100" b="1" dirty="0">
                 <a:solidFill>
-                  <a:srgbClr val="16A34A"/>
+                  <a:srgbClr val="DC2626"/>
                 </a:solidFill>
                 <a:latin typeface="Trebuchet MS" pitchFamily="34" charset="0"/>
                 <a:ea typeface="Trebuchet MS" pitchFamily="34" charset="-122"/>
                 <a:cs typeface="Trebuchet MS" pitchFamily="34" charset="-120"/>
               </a:rPr>
-              <a:t>TRUE</a:t>
+              <a:t>FALSE</a:t>
             </a:r>
             <a:endParaRPr lang="en-US" sz="1100" dirty="0"/>
           </a:p>
@@ -38438,7 +38288,7 @@
                 <a:ea typeface="Calibri" pitchFamily="34" charset="-122"/>
                 <a:cs typeface="Calibri" pitchFamily="34" charset="-120"/>
               </a:rPr>
-              <a:t>4.  The prefix 'over-' comes from Old English.</a:t>
+              <a:t>4.  The prefix 'over-' always means under or below.</a:t>
             </a:r>
             <a:endParaRPr lang="en-US" sz="1300" dirty="0"/>
           </a:p>
@@ -38461,11 +38311,11 @@
             </a:avLst>
           </a:prstGeom>
           <a:solidFill>
-            <a:srgbClr val="DCFCE7"/>
-          </a:solidFill>
-          <a:ln w="12700">
-            <a:solidFill>
-              <a:srgbClr val="16A34A"/>
+            <a:srgbClr val="FEE2E2"/>
+          </a:solidFill>
+          <a:ln w="12700">
+            <a:solidFill>
+              <a:srgbClr val="DC2626"/>
             </a:solidFill>
             <a:prstDash val="solid"/>
           </a:ln>
@@ -38498,13 +38348,13 @@
             <a:r>
               <a:rPr lang="en-US" sz="1100" b="1" dirty="0">
                 <a:solidFill>
-                  <a:srgbClr val="16A34A"/>
+                  <a:srgbClr val="DC2626"/>
                 </a:solidFill>
                 <a:latin typeface="Trebuchet MS" pitchFamily="34" charset="0"/>
                 <a:ea typeface="Trebuchet MS" pitchFamily="34" charset="-122"/>
                 <a:cs typeface="Trebuchet MS" pitchFamily="34" charset="-120"/>
               </a:rPr>
-              <a:t>TRUE</a:t>
+              <a:t>FALSE</a:t>
             </a:r>
             <a:endParaRPr lang="en-US" sz="1100" dirty="0"/>
           </a:p>
@@ -38577,7 +38427,7 @@
                 <a:ea typeface="Calibri" pitchFamily="34" charset="-122"/>
                 <a:cs typeface="Calibri" pitchFamily="34" charset="-120"/>
               </a:rPr>
-              <a:t>5.  The prefix 'over-' always means something is under or below.</a:t>
+              <a:t>5.  The word 'overflow' means when liquid spills over the top of a container.</a:t>
             </a:r>
             <a:endParaRPr lang="en-US" sz="1300" dirty="0"/>
           </a:p>
@@ -38600,11 +38450,11 @@
             </a:avLst>
           </a:prstGeom>
           <a:solidFill>
-            <a:srgbClr val="FEE2E2"/>
-          </a:solidFill>
-          <a:ln w="12700">
-            <a:solidFill>
-              <a:srgbClr val="DC2626"/>
+            <a:srgbClr val="DCFCE7"/>
+          </a:solidFill>
+          <a:ln w="12700">
+            <a:solidFill>
+              <a:srgbClr val="16A34A"/>
             </a:solidFill>
             <a:prstDash val="solid"/>
           </a:ln>
@@ -38637,13 +38487,13 @@
             <a:r>
               <a:rPr lang="en-US" sz="1100" b="1" dirty="0">
                 <a:solidFill>
-                  <a:srgbClr val="DC2626"/>
+                  <a:srgbClr val="16A34A"/>
                 </a:solidFill>
                 <a:latin typeface="Trebuchet MS" pitchFamily="34" charset="0"/>
                 <a:ea typeface="Trebuchet MS" pitchFamily="34" charset="-122"/>
                 <a:cs typeface="Trebuchet MS" pitchFamily="34" charset="-120"/>
               </a:rPr>
-              <a:t>FALSE</a:t>
+              <a:t>TRUE</a:t>
             </a:r>
             <a:endParaRPr lang="en-US" sz="1100" dirty="0"/>
           </a:p>
@@ -39216,7 +39066,7 @@
                 <a:ea typeface="Trebuchet MS" pitchFamily="34" charset="-122"/>
                 <a:cs typeface="Trebuchet MS" pitchFamily="34" charset="-120"/>
               </a:rPr>
-              <a:t>overflow</a:t>
+              <a:t>overload</a:t>
             </a:r>
             <a:endParaRPr lang="en-US" sz="1300" dirty="0"/>
           </a:p>
@@ -39282,7 +39132,7 @@
                 <a:ea typeface="Trebuchet MS" pitchFamily="34" charset="-122"/>
                 <a:cs typeface="Trebuchet MS" pitchFamily="34" charset="-120"/>
               </a:rPr>
-              <a:t>overload</a:t>
+              <a:t>overflow</a:t>
             </a:r>
             <a:endParaRPr lang="en-US" sz="1300" dirty="0"/>
           </a:p>
@@ -39414,7 +39264,7 @@
                 <a:ea typeface="Trebuchet MS" pitchFamily="34" charset="-122"/>
                 <a:cs typeface="Trebuchet MS" pitchFamily="34" charset="-120"/>
               </a:rPr>
-              <a:t>oversleep</a:t>
+              <a:t>overcome</a:t>
             </a:r>
             <a:endParaRPr lang="en-US" sz="1300" dirty="0"/>
           </a:p>
@@ -39480,7 +39330,7 @@
                 <a:ea typeface="Trebuchet MS" pitchFamily="34" charset="-122"/>
                 <a:cs typeface="Trebuchet MS" pitchFamily="34" charset="-120"/>
               </a:rPr>
-              <a:t>overturn</a:t>
+              <a:t>oversleep</a:t>
             </a:r>
             <a:endParaRPr lang="en-US" sz="1300" dirty="0"/>
           </a:p>
@@ -39546,7 +39396,7 @@
                 <a:ea typeface="Trebuchet MS" pitchFamily="34" charset="-122"/>
                 <a:cs typeface="Trebuchet MS" pitchFamily="34" charset="-120"/>
               </a:rPr>
-              <a:t>overcome</a:t>
+              <a:t>overdue</a:t>
             </a:r>
             <a:endParaRPr lang="en-US" sz="1300" dirty="0"/>
           </a:p>
@@ -40269,7 +40119,7 @@
                 <a:ea typeface="Trebuchet MS" pitchFamily="34" charset="-122"/>
                 <a:cs typeface="Trebuchet MS" pitchFamily="34" charset="-120"/>
               </a:rPr>
-              <a:t>flow</a:t>
+              <a:t>load</a:t>
             </a:r>
             <a:endParaRPr lang="en-US" sz="1300" dirty="0"/>
           </a:p>
@@ -40422,7 +40272,7 @@
                 <a:ea typeface="Trebuchet MS" pitchFamily="34" charset="-122"/>
                 <a:cs typeface="Trebuchet MS" pitchFamily="34" charset="-120"/>
               </a:rPr>
-              <a:t>load</a:t>
+              <a:t>flow</a:t>
             </a:r>
             <a:endParaRPr lang="en-US" sz="1300" dirty="0"/>
           </a:p>
@@ -40728,7 +40578,7 @@
                 <a:ea typeface="Trebuchet MS" pitchFamily="34" charset="-122"/>
                 <a:cs typeface="Trebuchet MS" pitchFamily="34" charset="-120"/>
               </a:rPr>
-              <a:t>sleep</a:t>
+              <a:t>come</a:t>
             </a:r>
             <a:endParaRPr lang="en-US" sz="1300" dirty="0"/>
           </a:p>
@@ -40881,7 +40731,7 @@
                 <a:ea typeface="Trebuchet MS" pitchFamily="34" charset="-122"/>
                 <a:cs typeface="Trebuchet MS" pitchFamily="34" charset="-120"/>
               </a:rPr>
-              <a:t>turn</a:t>
+              <a:t>sleep</a:t>
             </a:r>
             <a:endParaRPr lang="en-US" sz="1300" dirty="0"/>
           </a:p>
@@ -41169,7 +41019,7 @@
                 <a:ea typeface="Trebuchet MS" pitchFamily="34" charset="-122"/>
                 <a:cs typeface="Trebuchet MS" pitchFamily="34" charset="-120"/>
               </a:rPr>
-              <a:t>flow</a:t>
+              <a:t>load</a:t>
             </a:r>
             <a:endParaRPr lang="en-US" sz="1300" dirty="0"/>
           </a:p>
@@ -41386,7 +41236,7 @@
                 <a:ea typeface="Trebuchet MS" pitchFamily="34" charset="-122"/>
                 <a:cs typeface="Trebuchet MS" pitchFamily="34" charset="-120"/>
               </a:rPr>
-              <a:t>overflow</a:t>
+              <a:t>overload</a:t>
             </a:r>
             <a:endParaRPr lang="en-US" sz="1400" dirty="0"/>
           </a:p>
@@ -41790,7 +41640,7 @@
                 <a:ea typeface="Trebuchet MS" pitchFamily="34" charset="-122"/>
                 <a:cs typeface="Trebuchet MS" pitchFamily="34" charset="-120"/>
               </a:rPr>
-              <a:t>overflow</a:t>
+              <a:t>overload</a:t>
             </a:r>
             <a:endParaRPr lang="en-US" sz="1200" dirty="0"/>
           </a:p>
@@ -41929,7 +41779,7 @@
                 <a:ea typeface="Trebuchet MS" pitchFamily="34" charset="-122"/>
                 <a:cs typeface="Trebuchet MS" pitchFamily="34" charset="-120"/>
               </a:rPr>
-              <a:t>overload</a:t>
+              <a:t>overflow</a:t>
             </a:r>
             <a:endParaRPr lang="en-US" sz="1200" dirty="0"/>
           </a:p>
@@ -41995,7 +41845,7 @@
                 <a:ea typeface="Calibri" pitchFamily="34" charset="-122"/>
                 <a:cs typeface="Calibri" pitchFamily="34" charset="-120"/>
               </a:rPr>
-              <a:t>To sleep for longer than you meant to and wake up late.</a:t>
+              <a:t>To succeed in dealing with a problem or difficult situation.</a:t>
             </a:r>
             <a:endParaRPr lang="en-US" sz="1200" dirty="0"/>
           </a:p>
@@ -42134,7 +41984,7 @@
                 <a:ea typeface="Calibri" pitchFamily="34" charset="-122"/>
                 <a:cs typeface="Calibri" pitchFamily="34" charset="-120"/>
               </a:rPr>
-              <a:t>To successfully deal with a problem or difficulty.</a:t>
+              <a:t>Something that should have happened or been done already, like a library book that is late to return.</a:t>
             </a:r>
             <a:endParaRPr lang="en-US" sz="1200" dirty="0"/>
           </a:p>
@@ -42207,7 +42057,7 @@
                 <a:ea typeface="Trebuchet MS" pitchFamily="34" charset="-122"/>
                 <a:cs typeface="Trebuchet MS" pitchFamily="34" charset="-120"/>
               </a:rPr>
-              <a:t>oversleep</a:t>
+              <a:t>overcome</a:t>
             </a:r>
             <a:endParaRPr lang="en-US" sz="1200" dirty="0"/>
           </a:p>
@@ -42273,7 +42123,7 @@
                 <a:ea typeface="Calibri" pitchFamily="34" charset="-122"/>
                 <a:cs typeface="Calibri" pitchFamily="34" charset="-120"/>
               </a:rPr>
-              <a:t>When there is so much liquid in a container that it spills over the top.</a:t>
+              <a:t>To put too much into or onto something, like carrying too many heavy bags at once.</a:t>
             </a:r>
             <a:endParaRPr lang="en-US" sz="1200" dirty="0"/>
           </a:p>
@@ -42346,7 +42196,7 @@
                 <a:ea typeface="Trebuchet MS" pitchFamily="34" charset="-122"/>
                 <a:cs typeface="Trebuchet MS" pitchFamily="34" charset="-120"/>
               </a:rPr>
-              <a:t>overturn</a:t>
+              <a:t>oversleep</a:t>
             </a:r>
             <a:endParaRPr lang="en-US" sz="1200" dirty="0"/>
           </a:p>
@@ -42412,7 +42262,7 @@
                 <a:ea typeface="Calibri" pitchFamily="34" charset="-122"/>
                 <a:cs typeface="Calibri" pitchFamily="34" charset="-120"/>
               </a:rPr>
-              <a:t>To flip something upside down or knock it over.</a:t>
+              <a:t>To sleep for longer than you meant to and wake up late.</a:t>
             </a:r>
             <a:endParaRPr lang="en-US" sz="1200" dirty="0"/>
           </a:p>
@@ -42485,7 +42335,7 @@
                 <a:ea typeface="Trebuchet MS" pitchFamily="34" charset="-122"/>
                 <a:cs typeface="Trebuchet MS" pitchFamily="34" charset="-120"/>
               </a:rPr>
-              <a:t>overcome</a:t>
+              <a:t>overdue</a:t>
             </a:r>
             <a:endParaRPr lang="en-US" sz="1200" dirty="0"/>
           </a:p>
@@ -42551,7 +42401,7 @@
                 <a:ea typeface="Calibri" pitchFamily="34" charset="-122"/>
                 <a:cs typeface="Calibri" pitchFamily="34" charset="-120"/>
               </a:rPr>
-              <a:t>To miss something or not notice it; also to look down over a place from above.</a:t>
+              <a:t>To miss seeing something, or to have a view over a place from above.</a:t>
             </a:r>
             <a:endParaRPr lang="en-US" sz="1200" dirty="0"/>
           </a:p>
@@ -42690,7 +42540,7 @@
                 <a:ea typeface="Calibri" pitchFamily="34" charset="-122"/>
                 <a:cs typeface="Calibri" pitchFamily="34" charset="-120"/>
               </a:rPr>
-              <a:t>To put too much weight or work onto something or someone.</a:t>
+              <a:t>When a container gets too full and liquid spills over the top.</a:t>
             </a:r>
             <a:endParaRPr lang="en-US" sz="1200" dirty="0"/>
           </a:p>
@@ -43185,7 +43035,7 @@
                 <a:ea typeface="Calibri" pitchFamily="34" charset="-122"/>
                 <a:cs typeface="Calibri" pitchFamily="34" charset="-120"/>
               </a:rPr>
-              <a:t>The sink began to overflow because someone left the tap running.</a:t>
+              <a:t>The excited fans overflowed out of the stadium after the game.</a:t>
             </a:r>
             <a:endParaRPr lang="en-US" sz="1500" dirty="0"/>
           </a:p>
@@ -43349,7 +43199,7 @@
                 <a:ea typeface="Calibri" pitchFamily="34" charset="-122"/>
                 <a:cs typeface="Calibri" pitchFamily="34" charset="-120"/>
               </a:rPr>
-              <a:t>She was overjoyed when she found out she had won the art competition.</a:t>
+              <a:t>Mia tried not to overload her school bag with too many books.</a:t>
             </a:r>
             <a:endParaRPr lang="en-US" sz="1500" dirty="0"/>
           </a:p>
@@ -43513,7 +43363,7 @@
                 <a:ea typeface="Calibri" pitchFamily="34" charset="-122"/>
                 <a:cs typeface="Calibri" pitchFamily="34" charset="-120"/>
               </a:rPr>
-              <a:t>Tom tried not to oversleep on the first day of school camp.</a:t>
+              <a:t>The whole class was overjoyed when their teacher announced a free reading afternoon.</a:t>
             </a:r>
             <a:endParaRPr lang="en-US" sz="1500" dirty="0"/>
           </a:p>
